--- a/ECcourse/Differential_Evolution_Presentation.pptx
+++ b/ECcourse/Differential_Evolution_Presentation.pptx
@@ -13,18 +13,17 @@
     <p:sldId id="261" r:id="rId7"/>
     <p:sldId id="262" r:id="rId8"/>
     <p:sldId id="263" r:id="rId9"/>
-    <p:sldId id="264" r:id="rId10"/>
-    <p:sldId id="265" r:id="rId11"/>
-    <p:sldId id="266" r:id="rId12"/>
-    <p:sldId id="267" r:id="rId13"/>
-    <p:sldId id="268" r:id="rId14"/>
-    <p:sldId id="269" r:id="rId15"/>
-    <p:sldId id="270" r:id="rId16"/>
-    <p:sldId id="271" r:id="rId17"/>
-    <p:sldId id="272" r:id="rId18"/>
+    <p:sldId id="265" r:id="rId10"/>
+    <p:sldId id="266" r:id="rId11"/>
+    <p:sldId id="267" r:id="rId12"/>
+    <p:sldId id="268" r:id="rId13"/>
+    <p:sldId id="269" r:id="rId14"/>
+    <p:sldId id="270" r:id="rId15"/>
+    <p:sldId id="271" r:id="rId16"/>
+    <p:sldId id="272" r:id="rId17"/>
   </p:sldIdLst>
   <p:sldSz cx="12192000" cy="6858000"/>
-  <p:notesSz cx="6858000" cy="9144000"/>
+  <p:notesSz cx="9296400" cy="7010400"/>
   <p:defaultTextStyle>
     <a:defPPr>
       <a:defRPr lang="en-US"/>
@@ -318,7 +317,7 @@
           <a:p>
             <a:fld id="{5BCAD085-E8A6-8845-BD4E-CB4CCA059FC4}" type="datetimeFigureOut">
               <a:rPr lang="en-US" smtClean="0"/>
-              <a:t>9/30/2026</a:t>
+              <a:t>10/1/2026</a:t>
             </a:fld>
             <a:endParaRPr lang="en-US"/>
           </a:p>
@@ -486,7 +485,7 @@
           <a:p>
             <a:fld id="{5BCAD085-E8A6-8845-BD4E-CB4CCA059FC4}" type="datetimeFigureOut">
               <a:rPr lang="en-US" smtClean="0"/>
-              <a:t>9/30/2026</a:t>
+              <a:t>10/1/2026</a:t>
             </a:fld>
             <a:endParaRPr lang="en-US"/>
           </a:p>
@@ -664,7 +663,7 @@
           <a:p>
             <a:fld id="{5BCAD085-E8A6-8845-BD4E-CB4CCA059FC4}" type="datetimeFigureOut">
               <a:rPr lang="en-US" smtClean="0"/>
-              <a:t>9/30/2026</a:t>
+              <a:t>10/1/2026</a:t>
             </a:fld>
             <a:endParaRPr lang="en-US"/>
           </a:p>
@@ -832,7 +831,7 @@
           <a:p>
             <a:fld id="{5BCAD085-E8A6-8845-BD4E-CB4CCA059FC4}" type="datetimeFigureOut">
               <a:rPr lang="en-US" smtClean="0"/>
-              <a:t>9/30/2026</a:t>
+              <a:t>10/1/2026</a:t>
             </a:fld>
             <a:endParaRPr lang="en-US"/>
           </a:p>
@@ -1077,7 +1076,7 @@
           <a:p>
             <a:fld id="{5BCAD085-E8A6-8845-BD4E-CB4CCA059FC4}" type="datetimeFigureOut">
               <a:rPr lang="en-US" smtClean="0"/>
-              <a:t>9/30/2026</a:t>
+              <a:t>10/1/2026</a:t>
             </a:fld>
             <a:endParaRPr lang="en-US"/>
           </a:p>
@@ -1362,7 +1361,7 @@
           <a:p>
             <a:fld id="{5BCAD085-E8A6-8845-BD4E-CB4CCA059FC4}" type="datetimeFigureOut">
               <a:rPr lang="en-US" smtClean="0"/>
-              <a:t>9/30/2026</a:t>
+              <a:t>10/1/2026</a:t>
             </a:fld>
             <a:endParaRPr lang="en-US"/>
           </a:p>
@@ -1781,7 +1780,7 @@
           <a:p>
             <a:fld id="{5BCAD085-E8A6-8845-BD4E-CB4CCA059FC4}" type="datetimeFigureOut">
               <a:rPr lang="en-US" smtClean="0"/>
-              <a:t>9/30/2026</a:t>
+              <a:t>10/1/2026</a:t>
             </a:fld>
             <a:endParaRPr lang="en-US"/>
           </a:p>
@@ -1898,7 +1897,7 @@
           <a:p>
             <a:fld id="{5BCAD085-E8A6-8845-BD4E-CB4CCA059FC4}" type="datetimeFigureOut">
               <a:rPr lang="en-US" smtClean="0"/>
-              <a:t>9/30/2026</a:t>
+              <a:t>10/1/2026</a:t>
             </a:fld>
             <a:endParaRPr lang="en-US"/>
           </a:p>
@@ -1993,7 +1992,7 @@
           <a:p>
             <a:fld id="{5BCAD085-E8A6-8845-BD4E-CB4CCA059FC4}" type="datetimeFigureOut">
               <a:rPr lang="en-US" smtClean="0"/>
-              <a:t>9/30/2026</a:t>
+              <a:t>10/1/2026</a:t>
             </a:fld>
             <a:endParaRPr lang="en-US"/>
           </a:p>
@@ -2268,7 +2267,7 @@
           <a:p>
             <a:fld id="{5BCAD085-E8A6-8845-BD4E-CB4CCA059FC4}" type="datetimeFigureOut">
               <a:rPr lang="en-US" smtClean="0"/>
-              <a:t>9/30/2026</a:t>
+              <a:t>10/1/2026</a:t>
             </a:fld>
             <a:endParaRPr lang="en-US"/>
           </a:p>
@@ -2520,7 +2519,7 @@
           <a:p>
             <a:fld id="{5BCAD085-E8A6-8845-BD4E-CB4CCA059FC4}" type="datetimeFigureOut">
               <a:rPr lang="en-US" smtClean="0"/>
-              <a:t>9/30/2026</a:t>
+              <a:t>10/1/2026</a:t>
             </a:fld>
             <a:endParaRPr lang="en-US"/>
           </a:p>
@@ -2731,7 +2730,7 @@
           <a:p>
             <a:fld id="{5BCAD085-E8A6-8845-BD4E-CB4CCA059FC4}" type="datetimeFigureOut">
               <a:rPr lang="en-US" smtClean="0"/>
-              <a:t>9/30/2026</a:t>
+              <a:t>10/1/2026</a:t>
             </a:fld>
             <a:endParaRPr lang="en-US"/>
           </a:p>
@@ -3320,7 +3319,7 @@
         <p:spPr>
           <a:xfrm>
             <a:off x="594360" y="320040"/>
-            <a:ext cx="10972800" cy="731520"/>
+            <a:ext cx="4091120" cy="553998"/>
           </a:xfrm>
           <a:prstGeom prst="rect">
             <a:avLst/>
@@ -3341,7 +3340,12 @@
               </a:defRPr>
             </a:pPr>
             <a:r>
-              <a:t>9. Pseudocode</a:t>
+              <a:rPr lang="en-US" dirty="0"/>
+              <a:t>9</a:t>
+            </a:r>
+            <a:r>
+              <a:rPr dirty="0"/>
+              <a:t>. Important Parameters</a:t>
             </a:r>
           </a:p>
         </p:txBody>
@@ -3354,8 +3358,124 @@
         </p:nvSpPr>
         <p:spPr>
           <a:xfrm>
-            <a:off x="1005840" y="1417320"/>
-            <a:ext cx="10241280" cy="4480560"/>
+            <a:off x="621792" y="987552"/>
+            <a:ext cx="10789920" cy="411480"/>
+          </a:xfrm>
+          <a:prstGeom prst="rect">
+            <a:avLst/>
+          </a:prstGeom>
+          <a:noFill/>
+        </p:spPr>
+        <p:txBody>
+          <a:bodyPr wrap="none">
+            <a:spAutoFit/>
+          </a:bodyPr>
+          <a:lstStyle/>
+          <a:p>
+            <a:pPr>
+              <a:defRPr sz="1500">
+                <a:solidFill>
+                  <a:srgbClr val="69737D"/>
+                </a:solidFill>
+              </a:defRPr>
+            </a:pPr>
+            <a:r>
+              <a:t>DE is relatively simple, but parameter choices affect search behavior.</a:t>
+            </a:r>
+          </a:p>
+        </p:txBody>
+      </p:sp>
+      <p:sp>
+        <p:nvSpPr>
+          <p:cNvPr id="4" name="Rounded Rectangle 3"/>
+          <p:cNvSpPr/>
+          <p:nvPr/>
+        </p:nvSpPr>
+        <p:spPr>
+          <a:xfrm>
+            <a:off x="731520" y="1371600"/>
+            <a:ext cx="3383280" cy="1965960"/>
+          </a:xfrm>
+          <a:prstGeom prst="roundRect">
+            <a:avLst/>
+          </a:prstGeom>
+          <a:solidFill>
+            <a:srgbClr val="F2F6FA"/>
+          </a:solidFill>
+          <a:ln>
+            <a:solidFill>
+              <a:srgbClr val="3769B4"/>
+            </a:solidFill>
+          </a:ln>
+        </p:spPr>
+        <p:style>
+          <a:lnRef idx="1">
+            <a:schemeClr val="accent1"/>
+          </a:lnRef>
+          <a:fillRef idx="3">
+            <a:schemeClr val="accent1"/>
+          </a:fillRef>
+          <a:effectRef idx="2">
+            <a:schemeClr val="accent1"/>
+          </a:effectRef>
+          <a:fontRef idx="minor">
+            <a:schemeClr val="lt1"/>
+          </a:fontRef>
+        </p:style>
+        <p:txBody>
+          <a:bodyPr rtlCol="0" anchor="ctr"/>
+          <a:lstStyle/>
+          <a:p>
+            <a:pPr algn="ctr"/>
+            <a:endParaRPr/>
+          </a:p>
+        </p:txBody>
+      </p:sp>
+      <p:sp>
+        <p:nvSpPr>
+          <p:cNvPr id="5" name="TextBox 4"/>
+          <p:cNvSpPr txBox="1"/>
+          <p:nvPr/>
+        </p:nvSpPr>
+        <p:spPr>
+          <a:xfrm>
+            <a:off x="896112" y="1481328"/>
+            <a:ext cx="3054096" cy="411480"/>
+          </a:xfrm>
+          <a:prstGeom prst="rect">
+            <a:avLst/>
+          </a:prstGeom>
+          <a:noFill/>
+        </p:spPr>
+        <p:txBody>
+          <a:bodyPr wrap="none">
+            <a:spAutoFit/>
+          </a:bodyPr>
+          <a:lstStyle/>
+          <a:p>
+            <a:pPr>
+              <a:defRPr sz="1800" b="1">
+                <a:solidFill>
+                  <a:srgbClr val="3769B4"/>
+                </a:solidFill>
+              </a:defRPr>
+            </a:pPr>
+            <a:r>
+              <a:t>Population size (NP)</a:t>
+            </a:r>
+          </a:p>
+        </p:txBody>
+      </p:sp>
+      <p:sp>
+        <p:nvSpPr>
+          <p:cNvPr id="6" name="TextBox 5"/>
+          <p:cNvSpPr txBox="1"/>
+          <p:nvPr/>
+        </p:nvSpPr>
+        <p:spPr>
+          <a:xfrm>
+            <a:off x="896112" y="1965960"/>
+            <a:ext cx="3054096" cy="1252728"/>
           </a:xfrm>
           <a:prstGeom prst="rect">
             <a:avLst/>
@@ -3369,60 +3489,369 @@
           <a:lstStyle/>
           <a:p>
             <a:pPr>
-              <a:defRPr sz="2000">
+              <a:defRPr sz="1400">
                 <a:solidFill>
                   <a:srgbClr val="232830"/>
                 </a:solidFill>
-                <a:latin typeface="Consolas"/>
-              </a:defRPr>
-            </a:pPr>
-            <a:r>
-              <a:t>Initialize population X = {x₁, …, xNP}</a:t>
-            </a:r>
-            <a:br/>
-            <a:r>
-              <a:t>Evaluate f(xᵢ) for every vector</a:t>
-            </a:r>
-            <a:br/>
-            <a:br/>
-            <a:r>
-              <a:t>while stopping criterion is not met:</a:t>
-            </a:r>
-            <a:br/>
-            <a:r>
-              <a:t>    for each target vector xᵢ:</a:t>
-            </a:r>
-            <a:br/>
-            <a:r>
-              <a:t>        choose distinct r₁, r₂, r₃ ≠ i</a:t>
-            </a:r>
-            <a:br/>
-            <a:r>
-              <a:t>        vᵢ ← xᵣ₁ + F · (xᵣ₂ − xᵣ₃)</a:t>
-            </a:r>
-            <a:br/>
-            <a:r>
-              <a:t>        uᵢ ← crossover(xᵢ, vᵢ, CR)</a:t>
-            </a:r>
-            <a:br/>
-            <a:r>
-              <a:t>        if f(uᵢ) ≤ f(xᵢ):</a:t>
-            </a:r>
-            <a:br/>
-            <a:r>
-              <a:t>            xᵢ ← uᵢ</a:t>
-            </a:r>
-            <a:br/>
-            <a:br/>
-            <a:r>
-              <a:t>return best vector found</a:t>
-            </a:r>
-          </a:p>
-        </p:txBody>
-      </p:sp>
-      <p:sp>
-        <p:nvSpPr>
-          <p:cNvPr id="4" name="Rectangle 3"/>
+              </a:defRPr>
+            </a:pPr>
+            <a:r>
+              <a:t>Larger populations increase diversity and objective evaluations, but also increase computational cost.</a:t>
+            </a:r>
+          </a:p>
+        </p:txBody>
+      </p:sp>
+      <p:sp>
+        <p:nvSpPr>
+          <p:cNvPr id="7" name="Rounded Rectangle 6"/>
+          <p:cNvSpPr/>
+          <p:nvPr/>
+        </p:nvSpPr>
+        <p:spPr>
+          <a:xfrm>
+            <a:off x="4389120" y="1371600"/>
+            <a:ext cx="3383280" cy="1965960"/>
+          </a:xfrm>
+          <a:prstGeom prst="roundRect">
+            <a:avLst/>
+          </a:prstGeom>
+          <a:solidFill>
+            <a:srgbClr val="F2F6FA"/>
+          </a:solidFill>
+          <a:ln>
+            <a:solidFill>
+              <a:srgbClr val="2D9191"/>
+            </a:solidFill>
+          </a:ln>
+        </p:spPr>
+        <p:style>
+          <a:lnRef idx="1">
+            <a:schemeClr val="accent1"/>
+          </a:lnRef>
+          <a:fillRef idx="3">
+            <a:schemeClr val="accent1"/>
+          </a:fillRef>
+          <a:effectRef idx="2">
+            <a:schemeClr val="accent1"/>
+          </a:effectRef>
+          <a:fontRef idx="minor">
+            <a:schemeClr val="lt1"/>
+          </a:fontRef>
+        </p:style>
+        <p:txBody>
+          <a:bodyPr rtlCol="0" anchor="ctr"/>
+          <a:lstStyle/>
+          <a:p>
+            <a:pPr algn="ctr"/>
+            <a:endParaRPr/>
+          </a:p>
+        </p:txBody>
+      </p:sp>
+      <p:sp>
+        <p:nvSpPr>
+          <p:cNvPr id="8" name="TextBox 7"/>
+          <p:cNvSpPr txBox="1"/>
+          <p:nvPr/>
+        </p:nvSpPr>
+        <p:spPr>
+          <a:xfrm>
+            <a:off x="4553712" y="1481328"/>
+            <a:ext cx="3054096" cy="411480"/>
+          </a:xfrm>
+          <a:prstGeom prst="rect">
+            <a:avLst/>
+          </a:prstGeom>
+          <a:noFill/>
+        </p:spPr>
+        <p:txBody>
+          <a:bodyPr wrap="none">
+            <a:spAutoFit/>
+          </a:bodyPr>
+          <a:lstStyle/>
+          <a:p>
+            <a:pPr>
+              <a:defRPr sz="1800" b="1">
+                <a:solidFill>
+                  <a:srgbClr val="2D9191"/>
+                </a:solidFill>
+              </a:defRPr>
+            </a:pPr>
+            <a:r>
+              <a:t>Scale factor (F)</a:t>
+            </a:r>
+          </a:p>
+        </p:txBody>
+      </p:sp>
+      <p:sp>
+        <p:nvSpPr>
+          <p:cNvPr id="9" name="TextBox 8"/>
+          <p:cNvSpPr txBox="1"/>
+          <p:nvPr/>
+        </p:nvSpPr>
+        <p:spPr>
+          <a:xfrm>
+            <a:off x="4553712" y="1965960"/>
+            <a:ext cx="3054096" cy="1252728"/>
+          </a:xfrm>
+          <a:prstGeom prst="rect">
+            <a:avLst/>
+          </a:prstGeom>
+          <a:noFill/>
+        </p:spPr>
+        <p:txBody>
+          <a:bodyPr wrap="square">
+            <a:spAutoFit/>
+          </a:bodyPr>
+          <a:lstStyle/>
+          <a:p>
+            <a:pPr>
+              <a:defRPr sz="1400">
+                <a:solidFill>
+                  <a:srgbClr val="232830"/>
+                </a:solidFill>
+              </a:defRPr>
+            </a:pPr>
+            <a:r>
+              <a:t>Controls the magnitude of differential mutation. Larger values can encourage broader moves.</a:t>
+            </a:r>
+          </a:p>
+        </p:txBody>
+      </p:sp>
+      <p:sp>
+        <p:nvSpPr>
+          <p:cNvPr id="10" name="Rounded Rectangle 9"/>
+          <p:cNvSpPr/>
+          <p:nvPr/>
+        </p:nvSpPr>
+        <p:spPr>
+          <a:xfrm>
+            <a:off x="8046720" y="1371600"/>
+            <a:ext cx="3383280" cy="1965960"/>
+          </a:xfrm>
+          <a:prstGeom prst="roundRect">
+            <a:avLst/>
+          </a:prstGeom>
+          <a:solidFill>
+            <a:srgbClr val="F2F6FA"/>
+          </a:solidFill>
+          <a:ln>
+            <a:solidFill>
+              <a:srgbClr val="3769B4"/>
+            </a:solidFill>
+          </a:ln>
+        </p:spPr>
+        <p:style>
+          <a:lnRef idx="1">
+            <a:schemeClr val="accent1"/>
+          </a:lnRef>
+          <a:fillRef idx="3">
+            <a:schemeClr val="accent1"/>
+          </a:fillRef>
+          <a:effectRef idx="2">
+            <a:schemeClr val="accent1"/>
+          </a:effectRef>
+          <a:fontRef idx="minor">
+            <a:schemeClr val="lt1"/>
+          </a:fontRef>
+        </p:style>
+        <p:txBody>
+          <a:bodyPr rtlCol="0" anchor="ctr"/>
+          <a:lstStyle/>
+          <a:p>
+            <a:pPr algn="ctr"/>
+            <a:endParaRPr/>
+          </a:p>
+        </p:txBody>
+      </p:sp>
+      <p:sp>
+        <p:nvSpPr>
+          <p:cNvPr id="11" name="TextBox 10"/>
+          <p:cNvSpPr txBox="1"/>
+          <p:nvPr/>
+        </p:nvSpPr>
+        <p:spPr>
+          <a:xfrm>
+            <a:off x="8211312" y="1481328"/>
+            <a:ext cx="3054096" cy="411480"/>
+          </a:xfrm>
+          <a:prstGeom prst="rect">
+            <a:avLst/>
+          </a:prstGeom>
+          <a:noFill/>
+        </p:spPr>
+        <p:txBody>
+          <a:bodyPr wrap="none">
+            <a:spAutoFit/>
+          </a:bodyPr>
+          <a:lstStyle/>
+          <a:p>
+            <a:pPr>
+              <a:defRPr sz="1800" b="1">
+                <a:solidFill>
+                  <a:srgbClr val="3769B4"/>
+                </a:solidFill>
+              </a:defRPr>
+            </a:pPr>
+            <a:r>
+              <a:t>Crossover rate (CR)</a:t>
+            </a:r>
+          </a:p>
+        </p:txBody>
+      </p:sp>
+      <p:sp>
+        <p:nvSpPr>
+          <p:cNvPr id="12" name="TextBox 11"/>
+          <p:cNvSpPr txBox="1"/>
+          <p:nvPr/>
+        </p:nvSpPr>
+        <p:spPr>
+          <a:xfrm>
+            <a:off x="8211312" y="1965960"/>
+            <a:ext cx="3054096" cy="1252728"/>
+          </a:xfrm>
+          <a:prstGeom prst="rect">
+            <a:avLst/>
+          </a:prstGeom>
+          <a:noFill/>
+        </p:spPr>
+        <p:txBody>
+          <a:bodyPr wrap="square">
+            <a:spAutoFit/>
+          </a:bodyPr>
+          <a:lstStyle/>
+          <a:p>
+            <a:pPr>
+              <a:defRPr sz="1400">
+                <a:solidFill>
+                  <a:srgbClr val="232830"/>
+                </a:solidFill>
+              </a:defRPr>
+            </a:pPr>
+            <a:r>
+              <a:t>Controls how much of the mutant vector enters the trial vector.</a:t>
+            </a:r>
+          </a:p>
+        </p:txBody>
+      </p:sp>
+      <p:sp>
+        <p:nvSpPr>
+          <p:cNvPr id="13" name="Rounded Rectangle 12"/>
+          <p:cNvSpPr/>
+          <p:nvPr/>
+        </p:nvSpPr>
+        <p:spPr>
+          <a:xfrm>
+            <a:off x="2560320" y="3886200"/>
+            <a:ext cx="7040880" cy="1600200"/>
+          </a:xfrm>
+          <a:prstGeom prst="roundRect">
+            <a:avLst/>
+          </a:prstGeom>
+          <a:solidFill>
+            <a:srgbClr val="F2F6FA"/>
+          </a:solidFill>
+          <a:ln>
+            <a:solidFill>
+              <a:srgbClr val="2D9191"/>
+            </a:solidFill>
+          </a:ln>
+        </p:spPr>
+        <p:style>
+          <a:lnRef idx="1">
+            <a:schemeClr val="accent1"/>
+          </a:lnRef>
+          <a:fillRef idx="3">
+            <a:schemeClr val="accent1"/>
+          </a:fillRef>
+          <a:effectRef idx="2">
+            <a:schemeClr val="accent1"/>
+          </a:effectRef>
+          <a:fontRef idx="minor">
+            <a:schemeClr val="lt1"/>
+          </a:fontRef>
+        </p:style>
+        <p:txBody>
+          <a:bodyPr rtlCol="0" anchor="ctr"/>
+          <a:lstStyle/>
+          <a:p>
+            <a:pPr algn="ctr"/>
+            <a:endParaRPr/>
+          </a:p>
+        </p:txBody>
+      </p:sp>
+      <p:sp>
+        <p:nvSpPr>
+          <p:cNvPr id="14" name="TextBox 13"/>
+          <p:cNvSpPr txBox="1"/>
+          <p:nvPr/>
+        </p:nvSpPr>
+        <p:spPr>
+          <a:xfrm>
+            <a:off x="2724912" y="3995928"/>
+            <a:ext cx="6711696" cy="411480"/>
+          </a:xfrm>
+          <a:prstGeom prst="rect">
+            <a:avLst/>
+          </a:prstGeom>
+          <a:noFill/>
+        </p:spPr>
+        <p:txBody>
+          <a:bodyPr wrap="none">
+            <a:spAutoFit/>
+          </a:bodyPr>
+          <a:lstStyle/>
+          <a:p>
+            <a:pPr>
+              <a:defRPr sz="1800" b="1">
+                <a:solidFill>
+                  <a:srgbClr val="2D9191"/>
+                </a:solidFill>
+              </a:defRPr>
+            </a:pPr>
+            <a:r>
+              <a:t>Stopping criterion</a:t>
+            </a:r>
+          </a:p>
+        </p:txBody>
+      </p:sp>
+      <p:sp>
+        <p:nvSpPr>
+          <p:cNvPr id="15" name="TextBox 14"/>
+          <p:cNvSpPr txBox="1"/>
+          <p:nvPr/>
+        </p:nvSpPr>
+        <p:spPr>
+          <a:xfrm>
+            <a:off x="2724912" y="4480560"/>
+            <a:ext cx="6711696" cy="886968"/>
+          </a:xfrm>
+          <a:prstGeom prst="rect">
+            <a:avLst/>
+          </a:prstGeom>
+          <a:noFill/>
+        </p:spPr>
+        <p:txBody>
+          <a:bodyPr wrap="square">
+            <a:spAutoFit/>
+          </a:bodyPr>
+          <a:lstStyle/>
+          <a:p>
+            <a:pPr>
+              <a:defRPr sz="1400">
+                <a:solidFill>
+                  <a:srgbClr val="232830"/>
+                </a:solidFill>
+              </a:defRPr>
+            </a:pPr>
+            <a:r>
+              <a:t>Common choices include a maximum number of evaluations/generations, an objective threshold, or lack of improvement.</a:t>
+            </a:r>
+          </a:p>
+        </p:txBody>
+      </p:sp>
+      <p:sp>
+        <p:nvSpPr>
+          <p:cNvPr id="16" name="Rectangle 15"/>
           <p:cNvSpPr/>
           <p:nvPr/>
         </p:nvSpPr>
@@ -3466,7 +3895,7 @@
       </p:sp>
       <p:sp>
         <p:nvSpPr>
-          <p:cNvPr id="5" name="TextBox 4"/>
+          <p:cNvPr id="17" name="TextBox 16"/>
           <p:cNvSpPr txBox="1"/>
           <p:nvPr/>
         </p:nvSpPr>
@@ -3494,7 +3923,7 @@
               </a:defRPr>
             </a:pPr>
             <a:r>
-              <a:t>10</a:t>
+              <a:t>11</a:t>
             </a:r>
           </a:p>
         </p:txBody>
@@ -3533,7 +3962,7 @@
         <p:spPr>
           <a:xfrm>
             <a:off x="594360" y="320040"/>
-            <a:ext cx="10972800" cy="731520"/>
+            <a:ext cx="4122475" cy="553998"/>
           </a:xfrm>
           <a:prstGeom prst="rect">
             <a:avLst/>
@@ -3554,7 +3983,16 @@
               </a:defRPr>
             </a:pPr>
             <a:r>
-              <a:t>10. Important Parameters</a:t>
+              <a:rPr dirty="0"/>
+              <a:t>1</a:t>
+            </a:r>
+            <a:r>
+              <a:rPr lang="en-US" dirty="0"/>
+              <a:t>0</a:t>
+            </a:r>
+            <a:r>
+              <a:rPr dirty="0"/>
+              <a:t>. Common DE Variants</a:t>
             </a:r>
           </a:p>
         </p:txBody>
@@ -3589,651 +4027,13 @@
               </a:defRPr>
             </a:pPr>
             <a:r>
-              <a:t>DE is relatively simple, but parameter choices affect search behavior.</a:t>
-            </a:r>
-          </a:p>
-        </p:txBody>
-      </p:sp>
-      <p:sp>
-        <p:nvSpPr>
-          <p:cNvPr id="4" name="Rounded Rectangle 3"/>
-          <p:cNvSpPr/>
-          <p:nvPr/>
-        </p:nvSpPr>
-        <p:spPr>
-          <a:xfrm>
-            <a:off x="731520" y="1371600"/>
-            <a:ext cx="3383280" cy="1965960"/>
-          </a:xfrm>
-          <a:prstGeom prst="roundRect">
-            <a:avLst/>
-          </a:prstGeom>
-          <a:solidFill>
-            <a:srgbClr val="F2F6FA"/>
-          </a:solidFill>
-          <a:ln>
-            <a:solidFill>
-              <a:srgbClr val="3769B4"/>
-            </a:solidFill>
-          </a:ln>
-        </p:spPr>
-        <p:style>
-          <a:lnRef idx="1">
-            <a:schemeClr val="accent1"/>
-          </a:lnRef>
-          <a:fillRef idx="3">
-            <a:schemeClr val="accent1"/>
-          </a:fillRef>
-          <a:effectRef idx="2">
-            <a:schemeClr val="accent1"/>
-          </a:effectRef>
-          <a:fontRef idx="minor">
-            <a:schemeClr val="lt1"/>
-          </a:fontRef>
-        </p:style>
-        <p:txBody>
-          <a:bodyPr rtlCol="0" anchor="ctr"/>
-          <a:lstStyle/>
-          <a:p>
-            <a:pPr algn="ctr"/>
-            <a:endParaRPr/>
-          </a:p>
-        </p:txBody>
-      </p:sp>
-      <p:sp>
-        <p:nvSpPr>
-          <p:cNvPr id="5" name="TextBox 4"/>
-          <p:cNvSpPr txBox="1"/>
-          <p:nvPr/>
-        </p:nvSpPr>
-        <p:spPr>
-          <a:xfrm>
-            <a:off x="896112" y="1481328"/>
-            <a:ext cx="3054096" cy="411480"/>
-          </a:xfrm>
-          <a:prstGeom prst="rect">
-            <a:avLst/>
-          </a:prstGeom>
-          <a:noFill/>
-        </p:spPr>
-        <p:txBody>
-          <a:bodyPr wrap="none">
-            <a:spAutoFit/>
-          </a:bodyPr>
-          <a:lstStyle/>
-          <a:p>
-            <a:pPr>
-              <a:defRPr sz="1800" b="1">
-                <a:solidFill>
-                  <a:srgbClr val="3769B4"/>
-                </a:solidFill>
-              </a:defRPr>
-            </a:pPr>
-            <a:r>
-              <a:t>Population size (NP)</a:t>
-            </a:r>
-          </a:p>
-        </p:txBody>
-      </p:sp>
-      <p:sp>
-        <p:nvSpPr>
-          <p:cNvPr id="6" name="TextBox 5"/>
-          <p:cNvSpPr txBox="1"/>
-          <p:nvPr/>
-        </p:nvSpPr>
-        <p:spPr>
-          <a:xfrm>
-            <a:off x="896112" y="1965960"/>
-            <a:ext cx="3054096" cy="1252728"/>
-          </a:xfrm>
-          <a:prstGeom prst="rect">
-            <a:avLst/>
-          </a:prstGeom>
-          <a:noFill/>
-        </p:spPr>
-        <p:txBody>
-          <a:bodyPr wrap="square">
-            <a:spAutoFit/>
-          </a:bodyPr>
-          <a:lstStyle/>
-          <a:p>
-            <a:pPr>
-              <a:defRPr sz="1400">
-                <a:solidFill>
-                  <a:srgbClr val="232830"/>
-                </a:solidFill>
-              </a:defRPr>
-            </a:pPr>
-            <a:r>
-              <a:t>Larger populations increase diversity and objective evaluations, but also increase computational cost.</a:t>
-            </a:r>
-          </a:p>
-        </p:txBody>
-      </p:sp>
-      <p:sp>
-        <p:nvSpPr>
-          <p:cNvPr id="7" name="Rounded Rectangle 6"/>
-          <p:cNvSpPr/>
-          <p:nvPr/>
-        </p:nvSpPr>
-        <p:spPr>
-          <a:xfrm>
-            <a:off x="4389120" y="1371600"/>
-            <a:ext cx="3383280" cy="1965960"/>
-          </a:xfrm>
-          <a:prstGeom prst="roundRect">
-            <a:avLst/>
-          </a:prstGeom>
-          <a:solidFill>
-            <a:srgbClr val="F2F6FA"/>
-          </a:solidFill>
-          <a:ln>
-            <a:solidFill>
-              <a:srgbClr val="2D9191"/>
-            </a:solidFill>
-          </a:ln>
-        </p:spPr>
-        <p:style>
-          <a:lnRef idx="1">
-            <a:schemeClr val="accent1"/>
-          </a:lnRef>
-          <a:fillRef idx="3">
-            <a:schemeClr val="accent1"/>
-          </a:fillRef>
-          <a:effectRef idx="2">
-            <a:schemeClr val="accent1"/>
-          </a:effectRef>
-          <a:fontRef idx="minor">
-            <a:schemeClr val="lt1"/>
-          </a:fontRef>
-        </p:style>
-        <p:txBody>
-          <a:bodyPr rtlCol="0" anchor="ctr"/>
-          <a:lstStyle/>
-          <a:p>
-            <a:pPr algn="ctr"/>
-            <a:endParaRPr/>
-          </a:p>
-        </p:txBody>
-      </p:sp>
-      <p:sp>
-        <p:nvSpPr>
-          <p:cNvPr id="8" name="TextBox 7"/>
-          <p:cNvSpPr txBox="1"/>
-          <p:nvPr/>
-        </p:nvSpPr>
-        <p:spPr>
-          <a:xfrm>
-            <a:off x="4553712" y="1481328"/>
-            <a:ext cx="3054096" cy="411480"/>
-          </a:xfrm>
-          <a:prstGeom prst="rect">
-            <a:avLst/>
-          </a:prstGeom>
-          <a:noFill/>
-        </p:spPr>
-        <p:txBody>
-          <a:bodyPr wrap="none">
-            <a:spAutoFit/>
-          </a:bodyPr>
-          <a:lstStyle/>
-          <a:p>
-            <a:pPr>
-              <a:defRPr sz="1800" b="1">
-                <a:solidFill>
-                  <a:srgbClr val="2D9191"/>
-                </a:solidFill>
-              </a:defRPr>
-            </a:pPr>
-            <a:r>
-              <a:t>Scale factor (F)</a:t>
-            </a:r>
-          </a:p>
-        </p:txBody>
-      </p:sp>
-      <p:sp>
-        <p:nvSpPr>
-          <p:cNvPr id="9" name="TextBox 8"/>
-          <p:cNvSpPr txBox="1"/>
-          <p:nvPr/>
-        </p:nvSpPr>
-        <p:spPr>
-          <a:xfrm>
-            <a:off x="4553712" y="1965960"/>
-            <a:ext cx="3054096" cy="1252728"/>
-          </a:xfrm>
-          <a:prstGeom prst="rect">
-            <a:avLst/>
-          </a:prstGeom>
-          <a:noFill/>
-        </p:spPr>
-        <p:txBody>
-          <a:bodyPr wrap="square">
-            <a:spAutoFit/>
-          </a:bodyPr>
-          <a:lstStyle/>
-          <a:p>
-            <a:pPr>
-              <a:defRPr sz="1400">
-                <a:solidFill>
-                  <a:srgbClr val="232830"/>
-                </a:solidFill>
-              </a:defRPr>
-            </a:pPr>
-            <a:r>
-              <a:t>Controls the magnitude of differential mutation. Larger values can encourage broader moves.</a:t>
-            </a:r>
-          </a:p>
-        </p:txBody>
-      </p:sp>
-      <p:sp>
-        <p:nvSpPr>
-          <p:cNvPr id="10" name="Rounded Rectangle 9"/>
-          <p:cNvSpPr/>
-          <p:nvPr/>
-        </p:nvSpPr>
-        <p:spPr>
-          <a:xfrm>
-            <a:off x="8046720" y="1371600"/>
-            <a:ext cx="3383280" cy="1965960"/>
-          </a:xfrm>
-          <a:prstGeom prst="roundRect">
-            <a:avLst/>
-          </a:prstGeom>
-          <a:solidFill>
-            <a:srgbClr val="F2F6FA"/>
-          </a:solidFill>
-          <a:ln>
-            <a:solidFill>
-              <a:srgbClr val="3769B4"/>
-            </a:solidFill>
-          </a:ln>
-        </p:spPr>
-        <p:style>
-          <a:lnRef idx="1">
-            <a:schemeClr val="accent1"/>
-          </a:lnRef>
-          <a:fillRef idx="3">
-            <a:schemeClr val="accent1"/>
-          </a:fillRef>
-          <a:effectRef idx="2">
-            <a:schemeClr val="accent1"/>
-          </a:effectRef>
-          <a:fontRef idx="minor">
-            <a:schemeClr val="lt1"/>
-          </a:fontRef>
-        </p:style>
-        <p:txBody>
-          <a:bodyPr rtlCol="0" anchor="ctr"/>
-          <a:lstStyle/>
-          <a:p>
-            <a:pPr algn="ctr"/>
-            <a:endParaRPr/>
-          </a:p>
-        </p:txBody>
-      </p:sp>
-      <p:sp>
-        <p:nvSpPr>
-          <p:cNvPr id="11" name="TextBox 10"/>
-          <p:cNvSpPr txBox="1"/>
-          <p:nvPr/>
-        </p:nvSpPr>
-        <p:spPr>
-          <a:xfrm>
-            <a:off x="8211312" y="1481328"/>
-            <a:ext cx="3054096" cy="411480"/>
-          </a:xfrm>
-          <a:prstGeom prst="rect">
-            <a:avLst/>
-          </a:prstGeom>
-          <a:noFill/>
-        </p:spPr>
-        <p:txBody>
-          <a:bodyPr wrap="none">
-            <a:spAutoFit/>
-          </a:bodyPr>
-          <a:lstStyle/>
-          <a:p>
-            <a:pPr>
-              <a:defRPr sz="1800" b="1">
-                <a:solidFill>
-                  <a:srgbClr val="3769B4"/>
-                </a:solidFill>
-              </a:defRPr>
-            </a:pPr>
-            <a:r>
-              <a:t>Crossover rate (CR)</a:t>
-            </a:r>
-          </a:p>
-        </p:txBody>
-      </p:sp>
-      <p:sp>
-        <p:nvSpPr>
-          <p:cNvPr id="12" name="TextBox 11"/>
-          <p:cNvSpPr txBox="1"/>
-          <p:nvPr/>
-        </p:nvSpPr>
-        <p:spPr>
-          <a:xfrm>
-            <a:off x="8211312" y="1965960"/>
-            <a:ext cx="3054096" cy="1252728"/>
-          </a:xfrm>
-          <a:prstGeom prst="rect">
-            <a:avLst/>
-          </a:prstGeom>
-          <a:noFill/>
-        </p:spPr>
-        <p:txBody>
-          <a:bodyPr wrap="square">
-            <a:spAutoFit/>
-          </a:bodyPr>
-          <a:lstStyle/>
-          <a:p>
-            <a:pPr>
-              <a:defRPr sz="1400">
-                <a:solidFill>
-                  <a:srgbClr val="232830"/>
-                </a:solidFill>
-              </a:defRPr>
-            </a:pPr>
-            <a:r>
-              <a:t>Controls how much of the mutant vector enters the trial vector.</a:t>
-            </a:r>
-          </a:p>
-        </p:txBody>
-      </p:sp>
-      <p:sp>
-        <p:nvSpPr>
-          <p:cNvPr id="13" name="Rounded Rectangle 12"/>
-          <p:cNvSpPr/>
-          <p:nvPr/>
-        </p:nvSpPr>
-        <p:spPr>
-          <a:xfrm>
-            <a:off x="2560320" y="3886200"/>
-            <a:ext cx="7040880" cy="1600200"/>
-          </a:xfrm>
-          <a:prstGeom prst="roundRect">
-            <a:avLst/>
-          </a:prstGeom>
-          <a:solidFill>
-            <a:srgbClr val="F2F6FA"/>
-          </a:solidFill>
-          <a:ln>
-            <a:solidFill>
-              <a:srgbClr val="2D9191"/>
-            </a:solidFill>
-          </a:ln>
-        </p:spPr>
-        <p:style>
-          <a:lnRef idx="1">
-            <a:schemeClr val="accent1"/>
-          </a:lnRef>
-          <a:fillRef idx="3">
-            <a:schemeClr val="accent1"/>
-          </a:fillRef>
-          <a:effectRef idx="2">
-            <a:schemeClr val="accent1"/>
-          </a:effectRef>
-          <a:fontRef idx="minor">
-            <a:schemeClr val="lt1"/>
-          </a:fontRef>
-        </p:style>
-        <p:txBody>
-          <a:bodyPr rtlCol="0" anchor="ctr"/>
-          <a:lstStyle/>
-          <a:p>
-            <a:pPr algn="ctr"/>
-            <a:endParaRPr/>
-          </a:p>
-        </p:txBody>
-      </p:sp>
-      <p:sp>
-        <p:nvSpPr>
-          <p:cNvPr id="14" name="TextBox 13"/>
-          <p:cNvSpPr txBox="1"/>
-          <p:nvPr/>
-        </p:nvSpPr>
-        <p:spPr>
-          <a:xfrm>
-            <a:off x="2724912" y="3995928"/>
-            <a:ext cx="6711696" cy="411480"/>
-          </a:xfrm>
-          <a:prstGeom prst="rect">
-            <a:avLst/>
-          </a:prstGeom>
-          <a:noFill/>
-        </p:spPr>
-        <p:txBody>
-          <a:bodyPr wrap="none">
-            <a:spAutoFit/>
-          </a:bodyPr>
-          <a:lstStyle/>
-          <a:p>
-            <a:pPr>
-              <a:defRPr sz="1800" b="1">
-                <a:solidFill>
-                  <a:srgbClr val="2D9191"/>
-                </a:solidFill>
-              </a:defRPr>
-            </a:pPr>
-            <a:r>
-              <a:t>Stopping criterion</a:t>
-            </a:r>
-          </a:p>
-        </p:txBody>
-      </p:sp>
-      <p:sp>
-        <p:nvSpPr>
-          <p:cNvPr id="15" name="TextBox 14"/>
-          <p:cNvSpPr txBox="1"/>
-          <p:nvPr/>
-        </p:nvSpPr>
-        <p:spPr>
-          <a:xfrm>
-            <a:off x="2724912" y="4480560"/>
-            <a:ext cx="6711696" cy="886968"/>
-          </a:xfrm>
-          <a:prstGeom prst="rect">
-            <a:avLst/>
-          </a:prstGeom>
-          <a:noFill/>
-        </p:spPr>
-        <p:txBody>
-          <a:bodyPr wrap="square">
-            <a:spAutoFit/>
-          </a:bodyPr>
-          <a:lstStyle/>
-          <a:p>
-            <a:pPr>
-              <a:defRPr sz="1400">
-                <a:solidFill>
-                  <a:srgbClr val="232830"/>
-                </a:solidFill>
-              </a:defRPr>
-            </a:pPr>
-            <a:r>
-              <a:t>Common choices include a maximum number of evaluations/generations, an objective threshold, or lack of improvement.</a:t>
-            </a:r>
-          </a:p>
-        </p:txBody>
-      </p:sp>
-      <p:sp>
-        <p:nvSpPr>
-          <p:cNvPr id="16" name="Rectangle 15"/>
-          <p:cNvSpPr/>
-          <p:nvPr/>
-        </p:nvSpPr>
-        <p:spPr>
-          <a:xfrm>
-            <a:off x="0" y="6601968"/>
-            <a:ext cx="12191695" cy="256032"/>
-          </a:xfrm>
-          <a:prstGeom prst="rect">
-            <a:avLst/>
-          </a:prstGeom>
-          <a:solidFill>
-            <a:srgbClr val="192D4B"/>
-          </a:solidFill>
-          <a:ln>
-            <a:noFill/>
-          </a:ln>
-        </p:spPr>
-        <p:style>
-          <a:lnRef idx="1">
-            <a:schemeClr val="accent1"/>
-          </a:lnRef>
-          <a:fillRef idx="3">
-            <a:schemeClr val="accent1"/>
-          </a:fillRef>
-          <a:effectRef idx="2">
-            <a:schemeClr val="accent1"/>
-          </a:effectRef>
-          <a:fontRef idx="minor">
-            <a:schemeClr val="lt1"/>
-          </a:fontRef>
-        </p:style>
-        <p:txBody>
-          <a:bodyPr rtlCol="0" anchor="ctr"/>
-          <a:lstStyle/>
-          <a:p>
-            <a:pPr algn="ctr"/>
-            <a:endParaRPr/>
-          </a:p>
-        </p:txBody>
-      </p:sp>
-      <p:sp>
-        <p:nvSpPr>
-          <p:cNvPr id="17" name="TextBox 16"/>
-          <p:cNvSpPr txBox="1"/>
-          <p:nvPr/>
-        </p:nvSpPr>
-        <p:spPr>
-          <a:xfrm>
-            <a:off x="11292840" y="6629400"/>
-            <a:ext cx="548640" cy="182880"/>
-          </a:xfrm>
-          <a:prstGeom prst="rect">
-            <a:avLst/>
-          </a:prstGeom>
-          <a:noFill/>
-        </p:spPr>
-        <p:txBody>
-          <a:bodyPr wrap="none">
-            <a:spAutoFit/>
-          </a:bodyPr>
-          <a:lstStyle/>
-          <a:p>
-            <a:pPr algn="r">
-              <a:defRPr sz="900">
-                <a:solidFill>
-                  <a:srgbClr val="FFFFFF"/>
-                </a:solidFill>
-              </a:defRPr>
-            </a:pPr>
-            <a:r>
-              <a:t>11</a:t>
-            </a:r>
-          </a:p>
-        </p:txBody>
-      </p:sp>
-    </p:spTree>
-  </p:cSld>
-  <p:clrMapOvr>
-    <a:masterClrMapping/>
-  </p:clrMapOvr>
-</p:sld>
-</file>
-
-<file path=ppt/slides/slide12.xml><?xml version="1.0" encoding="utf-8"?>
-<p:sld xmlns:a="http://schemas.openxmlformats.org/drawingml/2006/main" xmlns:r="http://schemas.openxmlformats.org/officeDocument/2006/relationships" xmlns:p="http://schemas.openxmlformats.org/presentationml/2006/main">
-  <p:cSld>
-    <p:spTree>
-      <p:nvGrpSpPr>
-        <p:cNvPr id="1" name=""/>
-        <p:cNvGrpSpPr/>
-        <p:nvPr/>
-      </p:nvGrpSpPr>
-      <p:grpSpPr>
-        <a:xfrm>
-          <a:off x="0" y="0"/>
-          <a:ext cx="0" cy="0"/>
-          <a:chOff x="0" y="0"/>
-          <a:chExt cx="0" cy="0"/>
-        </a:xfrm>
-      </p:grpSpPr>
-      <p:sp>
-        <p:nvSpPr>
-          <p:cNvPr id="2" name="TextBox 1"/>
-          <p:cNvSpPr txBox="1"/>
-          <p:nvPr/>
-        </p:nvSpPr>
-        <p:spPr>
-          <a:xfrm>
-            <a:off x="594360" y="320040"/>
-            <a:ext cx="10972800" cy="731520"/>
-          </a:xfrm>
-          <a:prstGeom prst="rect">
-            <a:avLst/>
-          </a:prstGeom>
-          <a:noFill/>
-        </p:spPr>
-        <p:txBody>
-          <a:bodyPr wrap="none">
-            <a:spAutoFit/>
-          </a:bodyPr>
-          <a:lstStyle/>
-          <a:p>
-            <a:pPr>
-              <a:defRPr sz="3000" b="1">
-                <a:solidFill>
-                  <a:srgbClr val="192D4B"/>
-                </a:solidFill>
-              </a:defRPr>
-            </a:pPr>
-            <a:r>
-              <a:t>11. Common DE Variants</a:t>
-            </a:r>
-          </a:p>
-        </p:txBody>
-      </p:sp>
-      <p:sp>
-        <p:nvSpPr>
-          <p:cNvPr id="3" name="TextBox 2"/>
-          <p:cNvSpPr txBox="1"/>
-          <p:nvPr/>
-        </p:nvSpPr>
-        <p:spPr>
-          <a:xfrm>
-            <a:off x="621792" y="987552"/>
-            <a:ext cx="10789920" cy="411480"/>
-          </a:xfrm>
-          <a:prstGeom prst="rect">
-            <a:avLst/>
-          </a:prstGeom>
-          <a:noFill/>
-        </p:spPr>
-        <p:txBody>
-          <a:bodyPr wrap="none">
-            <a:spAutoFit/>
-          </a:bodyPr>
-          <a:lstStyle/>
-          <a:p>
-            <a:pPr>
-              <a:defRPr sz="1500">
-                <a:solidFill>
-                  <a:srgbClr val="69737D"/>
-                </a:solidFill>
-              </a:defRPr>
-            </a:pPr>
-            <a:r>
               <a:t>The notation often describes the mutation strategy.</a:t>
             </a:r>
           </a:p>
         </p:txBody>
       </p:sp>
-      <mc:AlternateContent xmlns:mc="http://schemas.openxmlformats.org/markup-compatibility/2006">
-        <mc:Choice xmlns:a14="http://schemas.microsoft.com/office/drawing/2010/main" Requires="a14">
+      <mc:AlternateContent xmlns:mc="http://schemas.openxmlformats.org/markup-compatibility/2006" xmlns:a14="http://schemas.microsoft.com/office/drawing/2010/main">
+        <mc:Choice Requires="a14">
           <p:sp>
             <p:nvSpPr>
               <p:cNvPr id="4" name="TextBox 3"/>
@@ -4288,7 +4088,10 @@
                 </a:pPr>
                 <a14:m>
                   <m:oMathPara xmlns:m="http://schemas.openxmlformats.org/officeDocument/2006/math">
-                    <m:oMath>
+                    <m:oMathParaPr>
+                      <m:jc m:val="centerGroup"/>
+                    </m:oMathParaPr>
+                    <m:oMath xmlns:m="http://schemas.openxmlformats.org/officeDocument/2006/math">
                       <m:sSubSup>
                         <m:sSubSupPr>
                           <m:ctrlPr>
@@ -4541,7 +4344,10 @@
                 <a:pPr/>
                 <a14:m>
                   <m:oMathPara xmlns:m="http://schemas.openxmlformats.org/officeDocument/2006/math">
-                    <m:oMath>
+                    <m:oMathParaPr>
+                      <m:jc m:val="centerGroup"/>
+                    </m:oMathParaPr>
+                    <m:oMath xmlns:m="http://schemas.openxmlformats.org/officeDocument/2006/math">
                       <m:sSubSup>
                         <m:sSubSupPr>
                           <m:ctrlPr>
@@ -4811,7 +4617,10 @@
                 </a:pPr>
                 <a14:m>
                   <m:oMathPara xmlns:m="http://schemas.openxmlformats.org/officeDocument/2006/math">
-                    <m:oMath>
+                    <m:oMathParaPr>
+                      <m:jc m:val="centerGroup"/>
+                    </m:oMathParaPr>
+                    <m:oMath xmlns:m="http://schemas.openxmlformats.org/officeDocument/2006/math">
                       <m:sSubSup>
                         <m:sSubSupPr>
                           <m:ctrlPr>
@@ -5136,7 +4945,7 @@
             </p:txBody>
           </p:sp>
         </mc:Choice>
-        <mc:Fallback>
+        <mc:Fallback xmlns="">
           <p:sp>
             <p:nvSpPr>
               <p:cNvPr id="4" name="TextBox 3"/>
@@ -5254,8 +5063,8 @@
           </a:p>
         </p:txBody>
       </p:sp>
-      <mc:AlternateContent xmlns:mc="http://schemas.openxmlformats.org/markup-compatibility/2006">
-        <mc:Choice xmlns:a14="http://schemas.microsoft.com/office/drawing/2010/main" Requires="a14">
+      <mc:AlternateContent xmlns:mc="http://schemas.openxmlformats.org/markup-compatibility/2006" xmlns:a14="http://schemas.microsoft.com/office/drawing/2010/main">
+        <mc:Choice Requires="a14">
           <p:sp>
             <p:nvSpPr>
               <p:cNvPr id="8" name="TextBox 7">
@@ -5287,7 +5096,10 @@
                 <a:pPr/>
                 <a14:m>
                   <m:oMathPara xmlns:m="http://schemas.openxmlformats.org/officeDocument/2006/math">
-                    <m:oMath>
+                    <m:oMathParaPr>
+                      <m:jc m:val="centerGroup"/>
+                    </m:oMathParaPr>
+                    <m:oMath xmlns:m="http://schemas.openxmlformats.org/officeDocument/2006/math">
                       <m:sSubSup>
                         <m:sSubSupPr>
                           <m:ctrlPr>
@@ -5653,7 +5465,7 @@
             </p:txBody>
           </p:sp>
         </mc:Choice>
-        <mc:Fallback>
+        <mc:Fallback xmlns="">
           <p:sp>
             <p:nvSpPr>
               <p:cNvPr id="8" name="TextBox 7">
@@ -5706,6 +5518,418 @@
 </p:sld>
 </file>
 
+<file path=ppt/slides/slide12.xml><?xml version="1.0" encoding="utf-8"?>
+<p:sld xmlns:a="http://schemas.openxmlformats.org/drawingml/2006/main" xmlns:r="http://schemas.openxmlformats.org/officeDocument/2006/relationships" xmlns:p="http://schemas.openxmlformats.org/presentationml/2006/main">
+  <p:cSld>
+    <p:spTree>
+      <p:nvGrpSpPr>
+        <p:cNvPr id="1" name=""/>
+        <p:cNvGrpSpPr/>
+        <p:nvPr/>
+      </p:nvGrpSpPr>
+      <p:grpSpPr>
+        <a:xfrm>
+          <a:off x="0" y="0"/>
+          <a:ext cx="0" cy="0"/>
+          <a:chOff x="0" y="0"/>
+          <a:chExt cx="0" cy="0"/>
+        </a:xfrm>
+      </p:grpSpPr>
+      <p:sp>
+        <p:nvSpPr>
+          <p:cNvPr id="2" name="TextBox 1"/>
+          <p:cNvSpPr txBox="1"/>
+          <p:nvPr/>
+        </p:nvSpPr>
+        <p:spPr>
+          <a:xfrm>
+            <a:off x="594360" y="320040"/>
+            <a:ext cx="4834913" cy="553998"/>
+          </a:xfrm>
+          <a:prstGeom prst="rect">
+            <a:avLst/>
+          </a:prstGeom>
+          <a:noFill/>
+        </p:spPr>
+        <p:txBody>
+          <a:bodyPr wrap="none">
+            <a:spAutoFit/>
+          </a:bodyPr>
+          <a:lstStyle/>
+          <a:p>
+            <a:pPr>
+              <a:defRPr sz="3000" b="1">
+                <a:solidFill>
+                  <a:srgbClr val="192D4B"/>
+                </a:solidFill>
+              </a:defRPr>
+            </a:pPr>
+            <a:r>
+              <a:rPr dirty="0"/>
+              <a:t>1</a:t>
+            </a:r>
+            <a:r>
+              <a:rPr lang="en-US" dirty="0"/>
+              <a:t>1</a:t>
+            </a:r>
+            <a:r>
+              <a:rPr dirty="0"/>
+              <a:t>. Strengths and Limitations</a:t>
+            </a:r>
+          </a:p>
+        </p:txBody>
+      </p:sp>
+      <p:sp>
+        <p:nvSpPr>
+          <p:cNvPr id="3" name="Rounded Rectangle 2"/>
+          <p:cNvSpPr/>
+          <p:nvPr/>
+        </p:nvSpPr>
+        <p:spPr>
+          <a:xfrm>
+            <a:off x="731520" y="1325880"/>
+            <a:ext cx="5212080" cy="4297680"/>
+          </a:xfrm>
+          <a:prstGeom prst="roundRect">
+            <a:avLst/>
+          </a:prstGeom>
+          <a:solidFill>
+            <a:srgbClr val="F2F6FA"/>
+          </a:solidFill>
+          <a:ln>
+            <a:solidFill>
+              <a:srgbClr val="3769B4"/>
+            </a:solidFill>
+          </a:ln>
+        </p:spPr>
+        <p:style>
+          <a:lnRef idx="1">
+            <a:schemeClr val="accent1"/>
+          </a:lnRef>
+          <a:fillRef idx="3">
+            <a:schemeClr val="accent1"/>
+          </a:fillRef>
+          <a:effectRef idx="2">
+            <a:schemeClr val="accent1"/>
+          </a:effectRef>
+          <a:fontRef idx="minor">
+            <a:schemeClr val="lt1"/>
+          </a:fontRef>
+        </p:style>
+        <p:txBody>
+          <a:bodyPr rtlCol="0" anchor="ctr"/>
+          <a:lstStyle/>
+          <a:p>
+            <a:pPr algn="ctr"/>
+            <a:endParaRPr/>
+          </a:p>
+        </p:txBody>
+      </p:sp>
+      <p:sp>
+        <p:nvSpPr>
+          <p:cNvPr id="4" name="TextBox 3"/>
+          <p:cNvSpPr txBox="1"/>
+          <p:nvPr/>
+        </p:nvSpPr>
+        <p:spPr>
+          <a:xfrm>
+            <a:off x="896112" y="1435607"/>
+            <a:ext cx="4882896" cy="411480"/>
+          </a:xfrm>
+          <a:prstGeom prst="rect">
+            <a:avLst/>
+          </a:prstGeom>
+          <a:noFill/>
+        </p:spPr>
+        <p:txBody>
+          <a:bodyPr wrap="none">
+            <a:spAutoFit/>
+          </a:bodyPr>
+          <a:lstStyle/>
+          <a:p>
+            <a:pPr>
+              <a:defRPr sz="1800" b="1">
+                <a:solidFill>
+                  <a:srgbClr val="3769B4"/>
+                </a:solidFill>
+              </a:defRPr>
+            </a:pPr>
+            <a:r>
+              <a:t>Strengths</a:t>
+            </a:r>
+          </a:p>
+        </p:txBody>
+      </p:sp>
+      <p:sp>
+        <p:nvSpPr>
+          <p:cNvPr id="5" name="TextBox 4"/>
+          <p:cNvSpPr txBox="1"/>
+          <p:nvPr/>
+        </p:nvSpPr>
+        <p:spPr>
+          <a:xfrm>
+            <a:off x="896112" y="1920240"/>
+            <a:ext cx="4882896" cy="3584448"/>
+          </a:xfrm>
+          <a:prstGeom prst="rect">
+            <a:avLst/>
+          </a:prstGeom>
+          <a:noFill/>
+        </p:spPr>
+        <p:txBody>
+          <a:bodyPr wrap="square">
+            <a:spAutoFit/>
+          </a:bodyPr>
+          <a:lstStyle/>
+          <a:p>
+            <a:pPr>
+              <a:defRPr sz="1400">
+                <a:solidFill>
+                  <a:srgbClr val="232830"/>
+                </a:solidFill>
+              </a:defRPr>
+            </a:pPr>
+            <a:r>
+              <a:t>• Derivative-free</a:t>
+            </a:r>
+            <a:br/>
+            <a:r>
+              <a:t>• Simple vector-based representation</a:t>
+            </a:r>
+            <a:br/>
+            <a:r>
+              <a:t>• Effective for many nonlinear continuous problems</a:t>
+            </a:r>
+            <a:br/>
+            <a:r>
+              <a:t>• Population differences adapt search directions</a:t>
+            </a:r>
+            <a:br/>
+            <a:r>
+              <a:t>• Few core operators and parameters</a:t>
+            </a:r>
+          </a:p>
+        </p:txBody>
+      </p:sp>
+      <p:sp>
+        <p:nvSpPr>
+          <p:cNvPr id="6" name="Rounded Rectangle 5"/>
+          <p:cNvSpPr/>
+          <p:nvPr/>
+        </p:nvSpPr>
+        <p:spPr>
+          <a:xfrm>
+            <a:off x="6263640" y="1325880"/>
+            <a:ext cx="5212080" cy="4297680"/>
+          </a:xfrm>
+          <a:prstGeom prst="roundRect">
+            <a:avLst/>
+          </a:prstGeom>
+          <a:solidFill>
+            <a:srgbClr val="F2F6FA"/>
+          </a:solidFill>
+          <a:ln>
+            <a:solidFill>
+              <a:srgbClr val="2D9191"/>
+            </a:solidFill>
+          </a:ln>
+        </p:spPr>
+        <p:style>
+          <a:lnRef idx="1">
+            <a:schemeClr val="accent1"/>
+          </a:lnRef>
+          <a:fillRef idx="3">
+            <a:schemeClr val="accent1"/>
+          </a:fillRef>
+          <a:effectRef idx="2">
+            <a:schemeClr val="accent1"/>
+          </a:effectRef>
+          <a:fontRef idx="minor">
+            <a:schemeClr val="lt1"/>
+          </a:fontRef>
+        </p:style>
+        <p:txBody>
+          <a:bodyPr rtlCol="0" anchor="ctr"/>
+          <a:lstStyle/>
+          <a:p>
+            <a:pPr algn="ctr"/>
+            <a:endParaRPr/>
+          </a:p>
+        </p:txBody>
+      </p:sp>
+      <p:sp>
+        <p:nvSpPr>
+          <p:cNvPr id="7" name="TextBox 6"/>
+          <p:cNvSpPr txBox="1"/>
+          <p:nvPr/>
+        </p:nvSpPr>
+        <p:spPr>
+          <a:xfrm>
+            <a:off x="6428231" y="1435607"/>
+            <a:ext cx="4882896" cy="411480"/>
+          </a:xfrm>
+          <a:prstGeom prst="rect">
+            <a:avLst/>
+          </a:prstGeom>
+          <a:noFill/>
+        </p:spPr>
+        <p:txBody>
+          <a:bodyPr wrap="none">
+            <a:spAutoFit/>
+          </a:bodyPr>
+          <a:lstStyle/>
+          <a:p>
+            <a:pPr>
+              <a:defRPr sz="1800" b="1">
+                <a:solidFill>
+                  <a:srgbClr val="2D9191"/>
+                </a:solidFill>
+              </a:defRPr>
+            </a:pPr>
+            <a:r>
+              <a:t>Limitations</a:t>
+            </a:r>
+          </a:p>
+        </p:txBody>
+      </p:sp>
+      <p:sp>
+        <p:nvSpPr>
+          <p:cNvPr id="8" name="TextBox 7"/>
+          <p:cNvSpPr txBox="1"/>
+          <p:nvPr/>
+        </p:nvSpPr>
+        <p:spPr>
+          <a:xfrm>
+            <a:off x="6428231" y="1920240"/>
+            <a:ext cx="4882896" cy="3584448"/>
+          </a:xfrm>
+          <a:prstGeom prst="rect">
+            <a:avLst/>
+          </a:prstGeom>
+          <a:noFill/>
+        </p:spPr>
+        <p:txBody>
+          <a:bodyPr wrap="square">
+            <a:spAutoFit/>
+          </a:bodyPr>
+          <a:lstStyle/>
+          <a:p>
+            <a:pPr>
+              <a:defRPr sz="1400">
+                <a:solidFill>
+                  <a:srgbClr val="232830"/>
+                </a:solidFill>
+              </a:defRPr>
+            </a:pPr>
+            <a:r>
+              <a:t>• Can require many objective evaluations</a:t>
+            </a:r>
+            <a:br/>
+            <a:r>
+              <a:t>• Performance depends on F, CR, population size, and strategy</a:t>
+            </a:r>
+            <a:br/>
+            <a:r>
+              <a:t>• Basic DE can stagnate or lose diversity</a:t>
+            </a:r>
+            <a:br/>
+            <a:r>
+              <a:t>• Constraint handling needs explicit design</a:t>
+            </a:r>
+            <a:br/>
+            <a:r>
+              <a:t>• Discrete/combinatorial problems may require specialized adaptations</a:t>
+            </a:r>
+          </a:p>
+        </p:txBody>
+      </p:sp>
+      <p:sp>
+        <p:nvSpPr>
+          <p:cNvPr id="9" name="Rectangle 8"/>
+          <p:cNvSpPr/>
+          <p:nvPr/>
+        </p:nvSpPr>
+        <p:spPr>
+          <a:xfrm>
+            <a:off x="0" y="6601968"/>
+            <a:ext cx="12191695" cy="256032"/>
+          </a:xfrm>
+          <a:prstGeom prst="rect">
+            <a:avLst/>
+          </a:prstGeom>
+          <a:solidFill>
+            <a:srgbClr val="192D4B"/>
+          </a:solidFill>
+          <a:ln>
+            <a:noFill/>
+          </a:ln>
+        </p:spPr>
+        <p:style>
+          <a:lnRef idx="1">
+            <a:schemeClr val="accent1"/>
+          </a:lnRef>
+          <a:fillRef idx="3">
+            <a:schemeClr val="accent1"/>
+          </a:fillRef>
+          <a:effectRef idx="2">
+            <a:schemeClr val="accent1"/>
+          </a:effectRef>
+          <a:fontRef idx="minor">
+            <a:schemeClr val="lt1"/>
+          </a:fontRef>
+        </p:style>
+        <p:txBody>
+          <a:bodyPr rtlCol="0" anchor="ctr"/>
+          <a:lstStyle/>
+          <a:p>
+            <a:pPr algn="ctr"/>
+            <a:endParaRPr/>
+          </a:p>
+        </p:txBody>
+      </p:sp>
+      <p:sp>
+        <p:nvSpPr>
+          <p:cNvPr id="10" name="TextBox 9"/>
+          <p:cNvSpPr txBox="1"/>
+          <p:nvPr/>
+        </p:nvSpPr>
+        <p:spPr>
+          <a:xfrm>
+            <a:off x="11292840" y="6629400"/>
+            <a:ext cx="548640" cy="182880"/>
+          </a:xfrm>
+          <a:prstGeom prst="rect">
+            <a:avLst/>
+          </a:prstGeom>
+          <a:noFill/>
+        </p:spPr>
+        <p:txBody>
+          <a:bodyPr wrap="none">
+            <a:spAutoFit/>
+          </a:bodyPr>
+          <a:lstStyle/>
+          <a:p>
+            <a:pPr algn="r">
+              <a:defRPr sz="900">
+                <a:solidFill>
+                  <a:srgbClr val="FFFFFF"/>
+                </a:solidFill>
+              </a:defRPr>
+            </a:pPr>
+            <a:r>
+              <a:t>13</a:t>
+            </a:r>
+          </a:p>
+        </p:txBody>
+      </p:sp>
+    </p:spTree>
+  </p:cSld>
+  <p:clrMapOvr>
+    <a:masterClrMapping/>
+  </p:clrMapOvr>
+</p:sld>
+</file>
+
 <file path=ppt/slides/slide13.xml><?xml version="1.0" encoding="utf-8"?>
 <p:sld xmlns:a="http://schemas.openxmlformats.org/drawingml/2006/main" xmlns:r="http://schemas.openxmlformats.org/officeDocument/2006/relationships" xmlns:p="http://schemas.openxmlformats.org/presentationml/2006/main">
   <p:cSld>
@@ -5732,7 +5956,7 @@
         <p:spPr>
           <a:xfrm>
             <a:off x="594360" y="320040"/>
-            <a:ext cx="10972800" cy="731520"/>
+            <a:ext cx="4867486" cy="553998"/>
           </a:xfrm>
           <a:prstGeom prst="rect">
             <a:avLst/>
@@ -5753,21 +5977,65 @@
               </a:defRPr>
             </a:pPr>
             <a:r>
-              <a:t>12. Strengths and Limitations</a:t>
-            </a:r>
-          </a:p>
-        </p:txBody>
-      </p:sp>
-      <p:sp>
-        <p:nvSpPr>
-          <p:cNvPr id="3" name="Rounded Rectangle 2"/>
+              <a:rPr dirty="0"/>
+              <a:t>1</a:t>
+            </a:r>
+            <a:r>
+              <a:rPr lang="en-US" dirty="0"/>
+              <a:t>2</a:t>
+            </a:r>
+            <a:r>
+              <a:rPr dirty="0"/>
+              <a:t>. DE vs. Genetic Algorithms</a:t>
+            </a:r>
+          </a:p>
+        </p:txBody>
+      </p:sp>
+      <p:sp>
+        <p:nvSpPr>
+          <p:cNvPr id="3" name="TextBox 2"/>
+          <p:cNvSpPr txBox="1"/>
+          <p:nvPr/>
+        </p:nvSpPr>
+        <p:spPr>
+          <a:xfrm>
+            <a:off x="621792" y="987552"/>
+            <a:ext cx="10789920" cy="411480"/>
+          </a:xfrm>
+          <a:prstGeom prst="rect">
+            <a:avLst/>
+          </a:prstGeom>
+          <a:noFill/>
+        </p:spPr>
+        <p:txBody>
+          <a:bodyPr wrap="none">
+            <a:spAutoFit/>
+          </a:bodyPr>
+          <a:lstStyle/>
+          <a:p>
+            <a:pPr>
+              <a:defRPr sz="1500">
+                <a:solidFill>
+                  <a:srgbClr val="69737D"/>
+                </a:solidFill>
+              </a:defRPr>
+            </a:pPr>
+            <a:r>
+              <a:t>Both are evolutionary algorithms, but their search operators differ.</a:t>
+            </a:r>
+          </a:p>
+        </p:txBody>
+      </p:sp>
+      <p:sp>
+        <p:nvSpPr>
+          <p:cNvPr id="4" name="Rounded Rectangle 3"/>
           <p:cNvSpPr/>
           <p:nvPr/>
         </p:nvSpPr>
         <p:spPr>
           <a:xfrm>
-            <a:off x="731520" y="1325880"/>
-            <a:ext cx="5212080" cy="4297680"/>
+            <a:off x="640080" y="1417320"/>
+            <a:ext cx="3429000" cy="3566160"/>
           </a:xfrm>
           <a:prstGeom prst="roundRect">
             <a:avLst/>
@@ -5806,14 +6074,14 @@
       </p:sp>
       <p:sp>
         <p:nvSpPr>
-          <p:cNvPr id="4" name="TextBox 3"/>
+          <p:cNvPr id="5" name="TextBox 4"/>
           <p:cNvSpPr txBox="1"/>
           <p:nvPr/>
         </p:nvSpPr>
         <p:spPr>
           <a:xfrm>
-            <a:off x="896112" y="1435607"/>
-            <a:ext cx="4882896" cy="411480"/>
+            <a:off x="804671" y="1527048"/>
+            <a:ext cx="3099816" cy="411480"/>
           </a:xfrm>
           <a:prstGeom prst="rect">
             <a:avLst/>
@@ -5834,21 +6102,21 @@
               </a:defRPr>
             </a:pPr>
             <a:r>
-              <a:t>Strengths</a:t>
-            </a:r>
-          </a:p>
-        </p:txBody>
-      </p:sp>
-      <p:sp>
-        <p:nvSpPr>
-          <p:cNvPr id="5" name="TextBox 4"/>
+              <a:t>Representation</a:t>
+            </a:r>
+          </a:p>
+        </p:txBody>
+      </p:sp>
+      <p:sp>
+        <p:nvSpPr>
+          <p:cNvPr id="6" name="TextBox 5"/>
           <p:cNvSpPr txBox="1"/>
           <p:nvPr/>
         </p:nvSpPr>
         <p:spPr>
           <a:xfrm>
-            <a:off x="896112" y="1920240"/>
-            <a:ext cx="4882896" cy="3584448"/>
+            <a:off x="804671" y="2011680"/>
+            <a:ext cx="3099816" cy="2852928"/>
           </a:xfrm>
           <a:prstGeom prst="rect">
             <a:avLst/>
@@ -5869,37 +6137,26 @@
               </a:defRPr>
             </a:pPr>
             <a:r>
-              <a:t>• Derivative-free</a:t>
+              <a:t>DE: usually real-valued vectors.</a:t>
             </a:r>
             <a:br/>
-            <a:r>
-              <a:t>• Simple vector-based representation</a:t>
-            </a:r>
             <a:br/>
             <a:r>
-              <a:t>• Effective for many nonlinear continuous problems</a:t>
-            </a:r>
-            <a:br/>
-            <a:r>
-              <a:t>• Population differences adapt search directions</a:t>
-            </a:r>
-            <a:br/>
-            <a:r>
-              <a:t>• Few core operators and parameters</a:t>
-            </a:r>
-          </a:p>
-        </p:txBody>
-      </p:sp>
-      <p:sp>
-        <p:nvSpPr>
-          <p:cNvPr id="6" name="Rounded Rectangle 5"/>
+              <a:t>GA: can use binary, real-valued, permutation, or other encodings.</a:t>
+            </a:r>
+          </a:p>
+        </p:txBody>
+      </p:sp>
+      <p:sp>
+        <p:nvSpPr>
+          <p:cNvPr id="7" name="Rounded Rectangle 6"/>
           <p:cNvSpPr/>
           <p:nvPr/>
         </p:nvSpPr>
         <p:spPr>
           <a:xfrm>
-            <a:off x="6263640" y="1325880"/>
-            <a:ext cx="5212080" cy="4297680"/>
+            <a:off x="4389120" y="1417320"/>
+            <a:ext cx="3429000" cy="3566160"/>
           </a:xfrm>
           <a:prstGeom prst="roundRect">
             <a:avLst/>
@@ -5938,14 +6195,14 @@
       </p:sp>
       <p:sp>
         <p:nvSpPr>
-          <p:cNvPr id="7" name="TextBox 6"/>
+          <p:cNvPr id="8" name="TextBox 7"/>
           <p:cNvSpPr txBox="1"/>
           <p:nvPr/>
         </p:nvSpPr>
         <p:spPr>
           <a:xfrm>
-            <a:off x="6428231" y="1435607"/>
-            <a:ext cx="4882896" cy="411480"/>
+            <a:off x="4553712" y="1527048"/>
+            <a:ext cx="3099816" cy="411480"/>
           </a:xfrm>
           <a:prstGeom prst="rect">
             <a:avLst/>
@@ -5966,21 +6223,21 @@
               </a:defRPr>
             </a:pPr>
             <a:r>
-              <a:t>Limitations</a:t>
-            </a:r>
-          </a:p>
-        </p:txBody>
-      </p:sp>
-      <p:sp>
-        <p:nvSpPr>
-          <p:cNvPr id="8" name="TextBox 7"/>
+              <a:t>Variation</a:t>
+            </a:r>
+          </a:p>
+        </p:txBody>
+      </p:sp>
+      <p:sp>
+        <p:nvSpPr>
+          <p:cNvPr id="9" name="TextBox 8"/>
           <p:cNvSpPr txBox="1"/>
           <p:nvPr/>
         </p:nvSpPr>
         <p:spPr>
           <a:xfrm>
-            <a:off x="6428231" y="1920240"/>
-            <a:ext cx="4882896" cy="3584448"/>
+            <a:off x="4553712" y="2011680"/>
+            <a:ext cx="3099816" cy="2852928"/>
           </a:xfrm>
           <a:prstGeom prst="rect">
             <a:avLst/>
@@ -6001,30 +6258,140 @@
               </a:defRPr>
             </a:pPr>
             <a:r>
-              <a:t>• Can require many objective evaluations</a:t>
+              <a:t>DE: differential mutation + crossover.</a:t>
             </a:r>
             <a:br/>
-            <a:r>
-              <a:t>• Performance depends on F, CR, population size, and strategy</a:t>
-            </a:r>
             <a:br/>
             <a:r>
-              <a:t>• Basic DE can stagnate or lose diversity</a:t>
+              <a:t>GA: commonly selection + crossover + mutation.</a:t>
+            </a:r>
+          </a:p>
+        </p:txBody>
+      </p:sp>
+      <p:sp>
+        <p:nvSpPr>
+          <p:cNvPr id="10" name="Rounded Rectangle 9"/>
+          <p:cNvSpPr/>
+          <p:nvPr/>
+        </p:nvSpPr>
+        <p:spPr>
+          <a:xfrm>
+            <a:off x="8138160" y="1417320"/>
+            <a:ext cx="3429000" cy="3566160"/>
+          </a:xfrm>
+          <a:prstGeom prst="roundRect">
+            <a:avLst/>
+          </a:prstGeom>
+          <a:solidFill>
+            <a:srgbClr val="F2F6FA"/>
+          </a:solidFill>
+          <a:ln>
+            <a:solidFill>
+              <a:srgbClr val="3769B4"/>
+            </a:solidFill>
+          </a:ln>
+        </p:spPr>
+        <p:style>
+          <a:lnRef idx="1">
+            <a:schemeClr val="accent1"/>
+          </a:lnRef>
+          <a:fillRef idx="3">
+            <a:schemeClr val="accent1"/>
+          </a:fillRef>
+          <a:effectRef idx="2">
+            <a:schemeClr val="accent1"/>
+          </a:effectRef>
+          <a:fontRef idx="minor">
+            <a:schemeClr val="lt1"/>
+          </a:fontRef>
+        </p:style>
+        <p:txBody>
+          <a:bodyPr rtlCol="0" anchor="ctr"/>
+          <a:lstStyle/>
+          <a:p>
+            <a:pPr algn="ctr"/>
+            <a:endParaRPr/>
+          </a:p>
+        </p:txBody>
+      </p:sp>
+      <p:sp>
+        <p:nvSpPr>
+          <p:cNvPr id="11" name="TextBox 10"/>
+          <p:cNvSpPr txBox="1"/>
+          <p:nvPr/>
+        </p:nvSpPr>
+        <p:spPr>
+          <a:xfrm>
+            <a:off x="8302752" y="1527048"/>
+            <a:ext cx="3099816" cy="411480"/>
+          </a:xfrm>
+          <a:prstGeom prst="rect">
+            <a:avLst/>
+          </a:prstGeom>
+          <a:noFill/>
+        </p:spPr>
+        <p:txBody>
+          <a:bodyPr wrap="none">
+            <a:spAutoFit/>
+          </a:bodyPr>
+          <a:lstStyle/>
+          <a:p>
+            <a:pPr>
+              <a:defRPr sz="1800" b="1">
+                <a:solidFill>
+                  <a:srgbClr val="3769B4"/>
+                </a:solidFill>
+              </a:defRPr>
+            </a:pPr>
+            <a:r>
+              <a:t>Search signal</a:t>
+            </a:r>
+          </a:p>
+        </p:txBody>
+      </p:sp>
+      <p:sp>
+        <p:nvSpPr>
+          <p:cNvPr id="12" name="TextBox 11"/>
+          <p:cNvSpPr txBox="1"/>
+          <p:nvPr/>
+        </p:nvSpPr>
+        <p:spPr>
+          <a:xfrm>
+            <a:off x="8302752" y="2011680"/>
+            <a:ext cx="3099816" cy="2852928"/>
+          </a:xfrm>
+          <a:prstGeom prst="rect">
+            <a:avLst/>
+          </a:prstGeom>
+          <a:noFill/>
+        </p:spPr>
+        <p:txBody>
+          <a:bodyPr wrap="square">
+            <a:spAutoFit/>
+          </a:bodyPr>
+          <a:lstStyle/>
+          <a:p>
+            <a:pPr>
+              <a:defRPr sz="1400">
+                <a:solidFill>
+                  <a:srgbClr val="232830"/>
+                </a:solidFill>
+              </a:defRPr>
+            </a:pPr>
+            <a:r>
+              <a:t>DE: population differences directly define mutation steps.</a:t>
             </a:r>
             <a:br/>
-            <a:r>
-              <a:t>• Constraint handling needs explicit design</a:t>
-            </a:r>
             <a:br/>
             <a:r>
-              <a:t>• Discrete/combinatorial problems may require specialized adaptations</a:t>
-            </a:r>
-          </a:p>
-        </p:txBody>
-      </p:sp>
-      <p:sp>
-        <p:nvSpPr>
-          <p:cNvPr id="9" name="Rectangle 8"/>
+              <a:t>GA: mutation/crossover depend on the chosen encoding and operators.</a:t>
+            </a:r>
+          </a:p>
+        </p:txBody>
+      </p:sp>
+      <p:sp>
+        <p:nvSpPr>
+          <p:cNvPr id="13" name="Rectangle 12"/>
           <p:cNvSpPr/>
           <p:nvPr/>
         </p:nvSpPr>
@@ -6068,7 +6435,7 @@
       </p:sp>
       <p:sp>
         <p:nvSpPr>
-          <p:cNvPr id="10" name="TextBox 9"/>
+          <p:cNvPr id="14" name="TextBox 13"/>
           <p:cNvSpPr txBox="1"/>
           <p:nvPr/>
         </p:nvSpPr>
@@ -6096,7 +6463,7 @@
               </a:defRPr>
             </a:pPr>
             <a:r>
-              <a:t>13</a:t>
+              <a:t>14</a:t>
             </a:r>
           </a:p>
         </p:txBody>
@@ -6135,7 +6502,7 @@
         <p:spPr>
           <a:xfrm>
             <a:off x="594360" y="320040"/>
-            <a:ext cx="10972800" cy="731520"/>
+            <a:ext cx="2738827" cy="553998"/>
           </a:xfrm>
           <a:prstGeom prst="rect">
             <a:avLst/>
@@ -6156,7 +6523,16 @@
               </a:defRPr>
             </a:pPr>
             <a:r>
-              <a:t>13. DE vs. Genetic Algorithms</a:t>
+              <a:rPr dirty="0"/>
+              <a:t>1</a:t>
+            </a:r>
+            <a:r>
+              <a:rPr lang="en-US" dirty="0"/>
+              <a:t>3</a:t>
+            </a:r>
+            <a:r>
+              <a:rPr dirty="0"/>
+              <a:t>. Applications</a:t>
             </a:r>
           </a:p>
         </p:txBody>
@@ -6169,124 +6545,8 @@
         </p:nvSpPr>
         <p:spPr>
           <a:xfrm>
-            <a:off x="621792" y="987552"/>
-            <a:ext cx="10789920" cy="411480"/>
-          </a:xfrm>
-          <a:prstGeom prst="rect">
-            <a:avLst/>
-          </a:prstGeom>
-          <a:noFill/>
-        </p:spPr>
-        <p:txBody>
-          <a:bodyPr wrap="none">
-            <a:spAutoFit/>
-          </a:bodyPr>
-          <a:lstStyle/>
-          <a:p>
-            <a:pPr>
-              <a:defRPr sz="1500">
-                <a:solidFill>
-                  <a:srgbClr val="69737D"/>
-                </a:solidFill>
-              </a:defRPr>
-            </a:pPr>
-            <a:r>
-              <a:t>Both are evolutionary algorithms, but their search operators differ.</a:t>
-            </a:r>
-          </a:p>
-        </p:txBody>
-      </p:sp>
-      <p:sp>
-        <p:nvSpPr>
-          <p:cNvPr id="4" name="Rounded Rectangle 3"/>
-          <p:cNvSpPr/>
-          <p:nvPr/>
-        </p:nvSpPr>
-        <p:spPr>
-          <a:xfrm>
-            <a:off x="640080" y="1417320"/>
-            <a:ext cx="3429000" cy="3566160"/>
-          </a:xfrm>
-          <a:prstGeom prst="roundRect">
-            <a:avLst/>
-          </a:prstGeom>
-          <a:solidFill>
-            <a:srgbClr val="F2F6FA"/>
-          </a:solidFill>
-          <a:ln>
-            <a:solidFill>
-              <a:srgbClr val="3769B4"/>
-            </a:solidFill>
-          </a:ln>
-        </p:spPr>
-        <p:style>
-          <a:lnRef idx="1">
-            <a:schemeClr val="accent1"/>
-          </a:lnRef>
-          <a:fillRef idx="3">
-            <a:schemeClr val="accent1"/>
-          </a:fillRef>
-          <a:effectRef idx="2">
-            <a:schemeClr val="accent1"/>
-          </a:effectRef>
-          <a:fontRef idx="minor">
-            <a:schemeClr val="lt1"/>
-          </a:fontRef>
-        </p:style>
-        <p:txBody>
-          <a:bodyPr rtlCol="0" anchor="ctr"/>
-          <a:lstStyle/>
-          <a:p>
-            <a:pPr algn="ctr"/>
-            <a:endParaRPr/>
-          </a:p>
-        </p:txBody>
-      </p:sp>
-      <p:sp>
-        <p:nvSpPr>
-          <p:cNvPr id="5" name="TextBox 4"/>
-          <p:cNvSpPr txBox="1"/>
-          <p:nvPr/>
-        </p:nvSpPr>
-        <p:spPr>
-          <a:xfrm>
-            <a:off x="804671" y="1527048"/>
-            <a:ext cx="3099816" cy="411480"/>
-          </a:xfrm>
-          <a:prstGeom prst="rect">
-            <a:avLst/>
-          </a:prstGeom>
-          <a:noFill/>
-        </p:spPr>
-        <p:txBody>
-          <a:bodyPr wrap="none">
-            <a:spAutoFit/>
-          </a:bodyPr>
-          <a:lstStyle/>
-          <a:p>
-            <a:pPr>
-              <a:defRPr sz="1800" b="1">
-                <a:solidFill>
-                  <a:srgbClr val="3769B4"/>
-                </a:solidFill>
-              </a:defRPr>
-            </a:pPr>
-            <a:r>
-              <a:t>Representation</a:t>
-            </a:r>
-          </a:p>
-        </p:txBody>
-      </p:sp>
-      <p:sp>
-        <p:nvSpPr>
-          <p:cNvPr id="6" name="TextBox 5"/>
-          <p:cNvSpPr txBox="1"/>
-          <p:nvPr/>
-        </p:nvSpPr>
-        <p:spPr>
-          <a:xfrm>
-            <a:off x="804671" y="2011680"/>
-            <a:ext cx="3099816" cy="2852928"/>
+            <a:off x="731520" y="1417320"/>
+            <a:ext cx="10698480" cy="4389120"/>
           </a:xfrm>
           <a:prstGeom prst="rect">
             <a:avLst/>
@@ -6300,268 +6560,99 @@
           <a:lstStyle/>
           <a:p>
             <a:pPr>
-              <a:defRPr sz="1400">
+              <a:spcAft>
+                <a:spcPts val="1200"/>
+              </a:spcAft>
+              <a:defRPr sz="2100" b="0">
                 <a:solidFill>
                   <a:srgbClr val="232830"/>
                 </a:solidFill>
               </a:defRPr>
             </a:pPr>
             <a:r>
-              <a:t>DE: usually real-valued vectors.</a:t>
-            </a:r>
-            <a:br/>
-            <a:br/>
-            <a:r>
-              <a:t>GA: can use binary, real-valued, permutation, or other encodings.</a:t>
-            </a:r>
-          </a:p>
-        </p:txBody>
-      </p:sp>
-      <p:sp>
-        <p:nvSpPr>
-          <p:cNvPr id="7" name="Rounded Rectangle 6"/>
-          <p:cNvSpPr/>
-          <p:nvPr/>
-        </p:nvSpPr>
-        <p:spPr>
-          <a:xfrm>
-            <a:off x="4389120" y="1417320"/>
-            <a:ext cx="3429000" cy="3566160"/>
-          </a:xfrm>
-          <a:prstGeom prst="roundRect">
-            <a:avLst/>
-          </a:prstGeom>
-          <a:solidFill>
-            <a:srgbClr val="F2F6FA"/>
-          </a:solidFill>
-          <a:ln>
-            <a:solidFill>
-              <a:srgbClr val="2D9191"/>
-            </a:solidFill>
-          </a:ln>
-        </p:spPr>
-        <p:style>
-          <a:lnRef idx="1">
-            <a:schemeClr val="accent1"/>
-          </a:lnRef>
-          <a:fillRef idx="3">
-            <a:schemeClr val="accent1"/>
-          </a:fillRef>
-          <a:effectRef idx="2">
-            <a:schemeClr val="accent1"/>
-          </a:effectRef>
-          <a:fontRef idx="minor">
-            <a:schemeClr val="lt1"/>
-          </a:fontRef>
-        </p:style>
-        <p:txBody>
-          <a:bodyPr rtlCol="0" anchor="ctr"/>
-          <a:lstStyle/>
-          <a:p>
-            <a:pPr algn="ctr"/>
-            <a:endParaRPr/>
-          </a:p>
-        </p:txBody>
-      </p:sp>
-      <p:sp>
-        <p:nvSpPr>
-          <p:cNvPr id="8" name="TextBox 7"/>
-          <p:cNvSpPr txBox="1"/>
-          <p:nvPr/>
-        </p:nvSpPr>
-        <p:spPr>
-          <a:xfrm>
-            <a:off x="4553712" y="1527048"/>
-            <a:ext cx="3099816" cy="411480"/>
-          </a:xfrm>
-          <a:prstGeom prst="rect">
-            <a:avLst/>
-          </a:prstGeom>
-          <a:noFill/>
-        </p:spPr>
-        <p:txBody>
-          <a:bodyPr wrap="none">
-            <a:spAutoFit/>
-          </a:bodyPr>
-          <a:lstStyle/>
+              <a:t>Engineering design and parameter optimization</a:t>
+            </a:r>
+          </a:p>
           <a:p>
             <a:pPr>
-              <a:defRPr sz="1800" b="1">
-                <a:solidFill>
-                  <a:srgbClr val="2D9191"/>
-                </a:solidFill>
-              </a:defRPr>
-            </a:pPr>
-            <a:r>
-              <a:t>Variation</a:t>
-            </a:r>
-          </a:p>
-        </p:txBody>
-      </p:sp>
-      <p:sp>
-        <p:nvSpPr>
-          <p:cNvPr id="9" name="TextBox 8"/>
-          <p:cNvSpPr txBox="1"/>
-          <p:nvPr/>
-        </p:nvSpPr>
-        <p:spPr>
-          <a:xfrm>
-            <a:off x="4553712" y="2011680"/>
-            <a:ext cx="3099816" cy="2852928"/>
-          </a:xfrm>
-          <a:prstGeom prst="rect">
-            <a:avLst/>
-          </a:prstGeom>
-          <a:noFill/>
-        </p:spPr>
-        <p:txBody>
-          <a:bodyPr wrap="square">
-            <a:spAutoFit/>
-          </a:bodyPr>
-          <a:lstStyle/>
+              <a:spcAft>
+                <a:spcPts val="1200"/>
+              </a:spcAft>
+              <a:defRPr sz="2100" b="0">
+                <a:solidFill>
+                  <a:srgbClr val="232830"/>
+                </a:solidFill>
+              </a:defRPr>
+            </a:pPr>
+            <a:r>
+              <a:t>Machine learning: hyperparameter and model parameter optimization</a:t>
+            </a:r>
+          </a:p>
           <a:p>
             <a:pPr>
-              <a:defRPr sz="1400">
+              <a:spcAft>
+                <a:spcPts val="1200"/>
+              </a:spcAft>
+              <a:defRPr sz="2100" b="0">
                 <a:solidFill>
                   <a:srgbClr val="232830"/>
                 </a:solidFill>
               </a:defRPr>
             </a:pPr>
             <a:r>
-              <a:t>DE: differential mutation + crossover.</a:t>
-            </a:r>
-            <a:br/>
-            <a:br/>
-            <a:r>
-              <a:t>GA: commonly selection + crossover + mutation.</a:t>
-            </a:r>
-          </a:p>
-        </p:txBody>
-      </p:sp>
-      <p:sp>
-        <p:nvSpPr>
-          <p:cNvPr id="10" name="Rounded Rectangle 9"/>
-          <p:cNvSpPr/>
-          <p:nvPr/>
-        </p:nvSpPr>
-        <p:spPr>
-          <a:xfrm>
-            <a:off x="8138160" y="1417320"/>
-            <a:ext cx="3429000" cy="3566160"/>
-          </a:xfrm>
-          <a:prstGeom prst="roundRect">
-            <a:avLst/>
-          </a:prstGeom>
-          <a:solidFill>
-            <a:srgbClr val="F2F6FA"/>
-          </a:solidFill>
-          <a:ln>
-            <a:solidFill>
-              <a:srgbClr val="3769B4"/>
-            </a:solidFill>
-          </a:ln>
-        </p:spPr>
-        <p:style>
-          <a:lnRef idx="1">
-            <a:schemeClr val="accent1"/>
-          </a:lnRef>
-          <a:fillRef idx="3">
-            <a:schemeClr val="accent1"/>
-          </a:fillRef>
-          <a:effectRef idx="2">
-            <a:schemeClr val="accent1"/>
-          </a:effectRef>
-          <a:fontRef idx="minor">
-            <a:schemeClr val="lt1"/>
-          </a:fontRef>
-        </p:style>
-        <p:txBody>
-          <a:bodyPr rtlCol="0" anchor="ctr"/>
-          <a:lstStyle/>
-          <a:p>
-            <a:pPr algn="ctr"/>
-            <a:endParaRPr/>
-          </a:p>
-        </p:txBody>
-      </p:sp>
-      <p:sp>
-        <p:nvSpPr>
-          <p:cNvPr id="11" name="TextBox 10"/>
-          <p:cNvSpPr txBox="1"/>
-          <p:nvPr/>
-        </p:nvSpPr>
-        <p:spPr>
-          <a:xfrm>
-            <a:off x="8302752" y="1527048"/>
-            <a:ext cx="3099816" cy="411480"/>
-          </a:xfrm>
-          <a:prstGeom prst="rect">
-            <a:avLst/>
-          </a:prstGeom>
-          <a:noFill/>
-        </p:spPr>
-        <p:txBody>
-          <a:bodyPr wrap="none">
-            <a:spAutoFit/>
-          </a:bodyPr>
-          <a:lstStyle/>
+              <a:t>Control and system identification</a:t>
+            </a:r>
+          </a:p>
           <a:p>
             <a:pPr>
-              <a:defRPr sz="1800" b="1">
-                <a:solidFill>
-                  <a:srgbClr val="3769B4"/>
-                </a:solidFill>
-              </a:defRPr>
-            </a:pPr>
-            <a:r>
-              <a:t>Search signal</a:t>
-            </a:r>
-          </a:p>
-        </p:txBody>
-      </p:sp>
-      <p:sp>
-        <p:nvSpPr>
-          <p:cNvPr id="12" name="TextBox 11"/>
-          <p:cNvSpPr txBox="1"/>
-          <p:nvPr/>
-        </p:nvSpPr>
-        <p:spPr>
-          <a:xfrm>
-            <a:off x="8302752" y="2011680"/>
-            <a:ext cx="3099816" cy="2852928"/>
-          </a:xfrm>
-          <a:prstGeom prst="rect">
-            <a:avLst/>
-          </a:prstGeom>
-          <a:noFill/>
-        </p:spPr>
-        <p:txBody>
-          <a:bodyPr wrap="square">
-            <a:spAutoFit/>
-          </a:bodyPr>
-          <a:lstStyle/>
+              <a:spcAft>
+                <a:spcPts val="1200"/>
+              </a:spcAft>
+              <a:defRPr sz="2100" b="0">
+                <a:solidFill>
+                  <a:srgbClr val="232830"/>
+                </a:solidFill>
+              </a:defRPr>
+            </a:pPr>
+            <a:r>
+              <a:t>Scheduling and planning when a continuous formulation is available</a:t>
+            </a:r>
+          </a:p>
           <a:p>
             <a:pPr>
-              <a:defRPr sz="1400">
+              <a:spcAft>
+                <a:spcPts val="1200"/>
+              </a:spcAft>
+              <a:defRPr sz="2100" b="0">
                 <a:solidFill>
                   <a:srgbClr val="232830"/>
                 </a:solidFill>
               </a:defRPr>
             </a:pPr>
             <a:r>
-              <a:t>DE: population differences directly define mutation steps.</a:t>
-            </a:r>
-            <a:br/>
-            <a:br/>
-            <a:r>
-              <a:t>GA: mutation/crossover depend on the chosen encoding and operators.</a:t>
-            </a:r>
-          </a:p>
-        </p:txBody>
-      </p:sp>
-      <p:sp>
-        <p:nvSpPr>
-          <p:cNvPr id="13" name="Rectangle 12"/>
+              <a:t>Signal/image processing and numerical model calibration</a:t>
+            </a:r>
+          </a:p>
+          <a:p>
+            <a:pPr>
+              <a:spcAft>
+                <a:spcPts val="1200"/>
+              </a:spcAft>
+              <a:defRPr sz="2100" b="0">
+                <a:solidFill>
+                  <a:srgbClr val="232830"/>
+                </a:solidFill>
+              </a:defRPr>
+            </a:pPr>
+            <a:r>
+              <a:t>Hybrid optimization: DE can be combined with local search or problem-specific heuristics</a:t>
+            </a:r>
+          </a:p>
+        </p:txBody>
+      </p:sp>
+      <p:sp>
+        <p:nvSpPr>
+          <p:cNvPr id="4" name="Rectangle 3"/>
           <p:cNvSpPr/>
           <p:nvPr/>
         </p:nvSpPr>
@@ -6605,7 +6696,7 @@
       </p:sp>
       <p:sp>
         <p:nvSpPr>
-          <p:cNvPr id="14" name="TextBox 13"/>
+          <p:cNvPr id="5" name="TextBox 4"/>
           <p:cNvSpPr txBox="1"/>
           <p:nvPr/>
         </p:nvSpPr>
@@ -6633,7 +6724,7 @@
               </a:defRPr>
             </a:pPr>
             <a:r>
-              <a:t>14</a:t>
+              <a:t>15</a:t>
             </a:r>
           </a:p>
         </p:txBody>
@@ -6672,7 +6763,7 @@
         <p:spPr>
           <a:xfrm>
             <a:off x="594360" y="320040"/>
-            <a:ext cx="10972800" cy="731520"/>
+            <a:ext cx="6286977" cy="553998"/>
           </a:xfrm>
           <a:prstGeom prst="rect">
             <a:avLst/>
@@ -6693,7 +6784,16 @@
               </a:defRPr>
             </a:pPr>
             <a:r>
-              <a:t>14. Applications</a:t>
+              <a:rPr dirty="0"/>
+              <a:t>1</a:t>
+            </a:r>
+            <a:r>
+              <a:rPr lang="en-US" dirty="0"/>
+              <a:t>4</a:t>
+            </a:r>
+            <a:r>
+              <a:rPr dirty="0"/>
+              <a:t>. Practical Implementation Checklist</a:t>
             </a:r>
           </a:p>
         </p:txBody>
@@ -6706,8 +6806,8 @@
         </p:nvSpPr>
         <p:spPr>
           <a:xfrm>
-            <a:off x="731520" y="1417320"/>
-            <a:ext cx="10698480" cy="4389120"/>
+            <a:off x="731520" y="1325880"/>
+            <a:ext cx="10698480" cy="4937760"/>
           </a:xfrm>
           <a:prstGeom prst="rect">
             <a:avLst/>
@@ -6724,14 +6824,14 @@
               <a:spcAft>
                 <a:spcPts val="1200"/>
               </a:spcAft>
-              <a:defRPr sz="2100" b="0">
+              <a:defRPr sz="1800" b="0">
                 <a:solidFill>
                   <a:srgbClr val="232830"/>
                 </a:solidFill>
               </a:defRPr>
             </a:pPr>
             <a:r>
-              <a:t>Engineering design and parameter optimization</a:t>
+              <a:t>1. Define the decision variables, bounds, and objective function.</a:t>
             </a:r>
           </a:p>
           <a:p>
@@ -6739,14 +6839,14 @@
               <a:spcAft>
                 <a:spcPts val="1200"/>
               </a:spcAft>
-              <a:defRPr sz="2100" b="0">
+              <a:defRPr sz="1800" b="0">
                 <a:solidFill>
                   <a:srgbClr val="232830"/>
                 </a:solidFill>
               </a:defRPr>
             </a:pPr>
             <a:r>
-              <a:t>Machine learning: hyperparameter and model parameter optimization</a:t>
+              <a:t>2. Choose a population size and initialize feasible vectors.</a:t>
             </a:r>
           </a:p>
           <a:p>
@@ -6754,14 +6854,14 @@
               <a:spcAft>
                 <a:spcPts val="1200"/>
               </a:spcAft>
-              <a:defRPr sz="2100" b="0">
+              <a:defRPr sz="1800" b="0">
                 <a:solidFill>
                   <a:srgbClr val="232830"/>
                 </a:solidFill>
               </a:defRPr>
             </a:pPr>
             <a:r>
-              <a:t>Control and system identification</a:t>
+              <a:t>3. Select a mutation strategy and values for F and CR.</a:t>
             </a:r>
           </a:p>
           <a:p>
@@ -6769,14 +6869,14 @@
               <a:spcAft>
                 <a:spcPts val="1200"/>
               </a:spcAft>
-              <a:defRPr sz="2100" b="0">
+              <a:defRPr sz="1800" b="0">
                 <a:solidFill>
                   <a:srgbClr val="232830"/>
                 </a:solidFill>
               </a:defRPr>
             </a:pPr>
             <a:r>
-              <a:t>Scheduling and planning when a continuous formulation is available</a:t>
+              <a:t>4. Handle bounds and constraints explicitly.</a:t>
             </a:r>
           </a:p>
           <a:p>
@@ -6784,14 +6884,14 @@
               <a:spcAft>
                 <a:spcPts val="1200"/>
               </a:spcAft>
-              <a:defRPr sz="2100" b="0">
+              <a:defRPr sz="1800" b="0">
                 <a:solidFill>
                   <a:srgbClr val="232830"/>
                 </a:solidFill>
               </a:defRPr>
             </a:pPr>
             <a:r>
-              <a:t>Signal/image processing and numerical model calibration</a:t>
+              <a:t>5. Track the best objective value and preserve the corresponding solution.</a:t>
             </a:r>
           </a:p>
           <a:p>
@@ -6799,14 +6899,44 @@
               <a:spcAft>
                 <a:spcPts val="1200"/>
               </a:spcAft>
-              <a:defRPr sz="2100" b="0">
+              <a:defRPr sz="1800" b="0">
                 <a:solidFill>
                   <a:srgbClr val="232830"/>
                 </a:solidFill>
               </a:defRPr>
             </a:pPr>
             <a:r>
-              <a:t>Hybrid optimization: DE can be combined with local search or problem-specific heuristics</a:t>
+              <a:t>6. Use a reproducible random seed for experiments.</a:t>
+            </a:r>
+          </a:p>
+          <a:p>
+            <a:pPr>
+              <a:spcAft>
+                <a:spcPts val="1200"/>
+              </a:spcAft>
+              <a:defRPr sz="1800" b="0">
+                <a:solidFill>
+                  <a:srgbClr val="232830"/>
+                </a:solidFill>
+              </a:defRPr>
+            </a:pPr>
+            <a:r>
+              <a:t>7. Run multiple independent trials when comparing stochastic algorithms.</a:t>
+            </a:r>
+          </a:p>
+          <a:p>
+            <a:pPr>
+              <a:spcAft>
+                <a:spcPts val="1200"/>
+              </a:spcAft>
+              <a:defRPr sz="1800" b="0">
+                <a:solidFill>
+                  <a:srgbClr val="232830"/>
+                </a:solidFill>
+              </a:defRPr>
+            </a:pPr>
+            <a:r>
+              <a:t>8. Report objective evaluations—not only generations—when computational cost matters.</a:t>
             </a:r>
           </a:p>
         </p:txBody>
@@ -6885,7 +7015,7 @@
               </a:defRPr>
             </a:pPr>
             <a:r>
-              <a:t>15</a:t>
+              <a:t>16</a:t>
             </a:r>
           </a:p>
         </p:txBody>
@@ -6924,7 +7054,7 @@
         <p:spPr>
           <a:xfrm>
             <a:off x="594360" y="320040"/>
-            <a:ext cx="10972800" cy="731520"/>
+            <a:ext cx="5521576" cy="553998"/>
           </a:xfrm>
           <a:prstGeom prst="rect">
             <a:avLst/>
@@ -6945,288 +7075,11 @@
               </a:defRPr>
             </a:pPr>
             <a:r>
-              <a:t>15. Practical Implementation Checklist</a:t>
-            </a:r>
-          </a:p>
-        </p:txBody>
-      </p:sp>
-      <p:sp>
-        <p:nvSpPr>
-          <p:cNvPr id="3" name="TextBox 2"/>
-          <p:cNvSpPr txBox="1"/>
-          <p:nvPr/>
-        </p:nvSpPr>
-        <p:spPr>
-          <a:xfrm>
-            <a:off x="731520" y="1325880"/>
-            <a:ext cx="10698480" cy="4937760"/>
-          </a:xfrm>
-          <a:prstGeom prst="rect">
-            <a:avLst/>
-          </a:prstGeom>
-          <a:noFill/>
-        </p:spPr>
-        <p:txBody>
-          <a:bodyPr wrap="square">
-            <a:spAutoFit/>
-          </a:bodyPr>
-          <a:lstStyle/>
-          <a:p>
-            <a:pPr>
-              <a:spcAft>
-                <a:spcPts val="1200"/>
-              </a:spcAft>
-              <a:defRPr sz="1800" b="0">
-                <a:solidFill>
-                  <a:srgbClr val="232830"/>
-                </a:solidFill>
-              </a:defRPr>
-            </a:pPr>
-            <a:r>
-              <a:t>1. Define the decision variables, bounds, and objective function.</a:t>
-            </a:r>
-          </a:p>
-          <a:p>
-            <a:pPr>
-              <a:spcAft>
-                <a:spcPts val="1200"/>
-              </a:spcAft>
-              <a:defRPr sz="1800" b="0">
-                <a:solidFill>
-                  <a:srgbClr val="232830"/>
-                </a:solidFill>
-              </a:defRPr>
-            </a:pPr>
-            <a:r>
-              <a:t>2. Choose a population size and initialize feasible vectors.</a:t>
-            </a:r>
-          </a:p>
-          <a:p>
-            <a:pPr>
-              <a:spcAft>
-                <a:spcPts val="1200"/>
-              </a:spcAft>
-              <a:defRPr sz="1800" b="0">
-                <a:solidFill>
-                  <a:srgbClr val="232830"/>
-                </a:solidFill>
-              </a:defRPr>
-            </a:pPr>
-            <a:r>
-              <a:t>3. Select a mutation strategy and values for F and CR.</a:t>
-            </a:r>
-          </a:p>
-          <a:p>
-            <a:pPr>
-              <a:spcAft>
-                <a:spcPts val="1200"/>
-              </a:spcAft>
-              <a:defRPr sz="1800" b="0">
-                <a:solidFill>
-                  <a:srgbClr val="232830"/>
-                </a:solidFill>
-              </a:defRPr>
-            </a:pPr>
-            <a:r>
-              <a:t>4. Handle bounds and constraints explicitly.</a:t>
-            </a:r>
-          </a:p>
-          <a:p>
-            <a:pPr>
-              <a:spcAft>
-                <a:spcPts val="1200"/>
-              </a:spcAft>
-              <a:defRPr sz="1800" b="0">
-                <a:solidFill>
-                  <a:srgbClr val="232830"/>
-                </a:solidFill>
-              </a:defRPr>
-            </a:pPr>
-            <a:r>
-              <a:t>5. Track the best objective value and preserve the corresponding solution.</a:t>
-            </a:r>
-          </a:p>
-          <a:p>
-            <a:pPr>
-              <a:spcAft>
-                <a:spcPts val="1200"/>
-              </a:spcAft>
-              <a:defRPr sz="1800" b="0">
-                <a:solidFill>
-                  <a:srgbClr val="232830"/>
-                </a:solidFill>
-              </a:defRPr>
-            </a:pPr>
-            <a:r>
-              <a:t>6. Use a reproducible random seed for experiments.</a:t>
-            </a:r>
-          </a:p>
-          <a:p>
-            <a:pPr>
-              <a:spcAft>
-                <a:spcPts val="1200"/>
-              </a:spcAft>
-              <a:defRPr sz="1800" b="0">
-                <a:solidFill>
-                  <a:srgbClr val="232830"/>
-                </a:solidFill>
-              </a:defRPr>
-            </a:pPr>
-            <a:r>
-              <a:t>7. Run multiple independent trials when comparing stochastic algorithms.</a:t>
-            </a:r>
-          </a:p>
-          <a:p>
-            <a:pPr>
-              <a:spcAft>
-                <a:spcPts val="1200"/>
-              </a:spcAft>
-              <a:defRPr sz="1800" b="0">
-                <a:solidFill>
-                  <a:srgbClr val="232830"/>
-                </a:solidFill>
-              </a:defRPr>
-            </a:pPr>
-            <a:r>
-              <a:t>8. Report objective evaluations—not only generations—when computational cost matters.</a:t>
-            </a:r>
-          </a:p>
-        </p:txBody>
-      </p:sp>
-      <p:sp>
-        <p:nvSpPr>
-          <p:cNvPr id="4" name="Rectangle 3"/>
-          <p:cNvSpPr/>
-          <p:nvPr/>
-        </p:nvSpPr>
-        <p:spPr>
-          <a:xfrm>
-            <a:off x="0" y="6601968"/>
-            <a:ext cx="12191695" cy="256032"/>
-          </a:xfrm>
-          <a:prstGeom prst="rect">
-            <a:avLst/>
-          </a:prstGeom>
-          <a:solidFill>
-            <a:srgbClr val="192D4B"/>
-          </a:solidFill>
-          <a:ln>
-            <a:noFill/>
-          </a:ln>
-        </p:spPr>
-        <p:style>
-          <a:lnRef idx="1">
-            <a:schemeClr val="accent1"/>
-          </a:lnRef>
-          <a:fillRef idx="3">
-            <a:schemeClr val="accent1"/>
-          </a:fillRef>
-          <a:effectRef idx="2">
-            <a:schemeClr val="accent1"/>
-          </a:effectRef>
-          <a:fontRef idx="minor">
-            <a:schemeClr val="lt1"/>
-          </a:fontRef>
-        </p:style>
-        <p:txBody>
-          <a:bodyPr rtlCol="0" anchor="ctr"/>
-          <a:lstStyle/>
-          <a:p>
-            <a:pPr algn="ctr"/>
-            <a:endParaRPr/>
-          </a:p>
-        </p:txBody>
-      </p:sp>
-      <p:sp>
-        <p:nvSpPr>
-          <p:cNvPr id="5" name="TextBox 4"/>
-          <p:cNvSpPr txBox="1"/>
-          <p:nvPr/>
-        </p:nvSpPr>
-        <p:spPr>
-          <a:xfrm>
-            <a:off x="11292840" y="6629400"/>
-            <a:ext cx="548640" cy="182880"/>
-          </a:xfrm>
-          <a:prstGeom prst="rect">
-            <a:avLst/>
-          </a:prstGeom>
-          <a:noFill/>
-        </p:spPr>
-        <p:txBody>
-          <a:bodyPr wrap="none">
-            <a:spAutoFit/>
-          </a:bodyPr>
-          <a:lstStyle/>
-          <a:p>
-            <a:pPr algn="r">
-              <a:defRPr sz="900">
-                <a:solidFill>
-                  <a:srgbClr val="FFFFFF"/>
-                </a:solidFill>
-              </a:defRPr>
-            </a:pPr>
-            <a:r>
-              <a:t>16</a:t>
-            </a:r>
-          </a:p>
-        </p:txBody>
-      </p:sp>
-    </p:spTree>
-  </p:cSld>
-  <p:clrMapOvr>
-    <a:masterClrMapping/>
-  </p:clrMapOvr>
-</p:sld>
-</file>
-
-<file path=ppt/slides/slide17.xml><?xml version="1.0" encoding="utf-8"?>
-<p:sld xmlns:a="http://schemas.openxmlformats.org/drawingml/2006/main" xmlns:r="http://schemas.openxmlformats.org/officeDocument/2006/relationships" xmlns:p="http://schemas.openxmlformats.org/presentationml/2006/main">
-  <p:cSld>
-    <p:spTree>
-      <p:nvGrpSpPr>
-        <p:cNvPr id="1" name=""/>
-        <p:cNvGrpSpPr/>
-        <p:nvPr/>
-      </p:nvGrpSpPr>
-      <p:grpSpPr>
-        <a:xfrm>
-          <a:off x="0" y="0"/>
-          <a:ext cx="0" cy="0"/>
-          <a:chOff x="0" y="0"/>
-          <a:chExt cx="0" cy="0"/>
-        </a:xfrm>
-      </p:grpSpPr>
-      <p:sp>
-        <p:nvSpPr>
-          <p:cNvPr id="2" name="TextBox 1"/>
-          <p:cNvSpPr txBox="1"/>
-          <p:nvPr/>
-        </p:nvSpPr>
-        <p:spPr>
-          <a:xfrm>
-            <a:off x="594360" y="320040"/>
-            <a:ext cx="10972800" cy="731520"/>
-          </a:xfrm>
-          <a:prstGeom prst="rect">
-            <a:avLst/>
-          </a:prstGeom>
-          <a:noFill/>
-        </p:spPr>
-        <p:txBody>
-          <a:bodyPr wrap="none">
-            <a:spAutoFit/>
-          </a:bodyPr>
-          <a:lstStyle/>
-          <a:p>
-            <a:pPr>
-              <a:defRPr sz="3000" b="1">
-                <a:solidFill>
-                  <a:srgbClr val="192D4B"/>
-                </a:solidFill>
-              </a:defRPr>
-            </a:pPr>
-            <a:r>
+              <a:rPr lang="en-US" dirty="0"/>
+              <a:t>15. </a:t>
+            </a:r>
+            <a:r>
+              <a:rPr dirty="0"/>
               <a:t>References &amp; Further Reading</a:t>
             </a:r>
           </a:p>
@@ -10691,7 +10544,7 @@
         <p:spPr>
           <a:xfrm>
             <a:off x="594360" y="320040"/>
-            <a:ext cx="10972800" cy="731520"/>
+            <a:ext cx="2504660" cy="553998"/>
           </a:xfrm>
           <a:prstGeom prst="rect">
             <a:avLst/>
@@ -10712,7 +10565,12 @@
               </a:defRPr>
             </a:pPr>
             <a:r>
-              <a:t>8. Worked Example: Minimize a Simple Function</a:t>
+              <a:rPr lang="en-US" dirty="0"/>
+              <a:t>8</a:t>
+            </a:r>
+            <a:r>
+              <a:rPr dirty="0"/>
+              <a:t>. Pseudocode</a:t>
             </a:r>
           </a:p>
         </p:txBody>
@@ -10725,78 +10583,8 @@
         </p:nvSpPr>
         <p:spPr>
           <a:xfrm>
-            <a:off x="621792" y="987552"/>
-            <a:ext cx="10789920" cy="411480"/>
-          </a:xfrm>
-          <a:prstGeom prst="rect">
-            <a:avLst/>
-          </a:prstGeom>
-          <a:noFill/>
-        </p:spPr>
-        <p:txBody>
-          <a:bodyPr wrap="none">
-            <a:spAutoFit/>
-          </a:bodyPr>
-          <a:lstStyle/>
-          <a:p>
-            <a:pPr>
-              <a:defRPr sz="1500">
-                <a:solidFill>
-                  <a:srgbClr val="69737D"/>
-                </a:solidFill>
-              </a:defRPr>
-            </a:pPr>
-            <a:r>
-              <a:t>Consider the Sphere function in two dimensions.</a:t>
-            </a:r>
-          </a:p>
-        </p:txBody>
-      </p:sp>
-      <p:sp>
-        <p:nvSpPr>
-          <p:cNvPr id="4" name="TextBox 3"/>
-          <p:cNvSpPr txBox="1"/>
-          <p:nvPr/>
-        </p:nvSpPr>
-        <p:spPr>
-          <a:xfrm>
-            <a:off x="822960" y="1645920"/>
-            <a:ext cx="10515600" cy="1097280"/>
-          </a:xfrm>
-          <a:prstGeom prst="rect">
-            <a:avLst/>
-          </a:prstGeom>
-          <a:noFill/>
-        </p:spPr>
-        <p:txBody>
-          <a:bodyPr wrap="none">
-            <a:spAutoFit/>
-          </a:bodyPr>
-          <a:lstStyle/>
-          <a:p>
-            <a:pPr algn="ctr">
-              <a:defRPr sz="2700" b="1">
-                <a:solidFill>
-                  <a:srgbClr val="2D9191"/>
-                </a:solidFill>
-              </a:defRPr>
-            </a:pPr>
-            <a:r>
-              <a:t>f(x₁,x₂) = x₁² + x₂²      → minimum at (0,0)</a:t>
-            </a:r>
-          </a:p>
-        </p:txBody>
-      </p:sp>
-      <p:sp>
-        <p:nvSpPr>
-          <p:cNvPr id="5" name="TextBox 4"/>
-          <p:cNvSpPr txBox="1"/>
-          <p:nvPr/>
-        </p:nvSpPr>
-        <p:spPr>
-          <a:xfrm>
-            <a:off x="731520" y="2926080"/>
-            <a:ext cx="10698480" cy="2743200"/>
+            <a:off x="1005840" y="1417320"/>
+            <a:ext cx="10241280" cy="4480560"/>
           </a:xfrm>
           <a:prstGeom prst="rect">
             <a:avLst/>
@@ -10810,84 +10598,60 @@
           <a:lstStyle/>
           <a:p>
             <a:pPr>
-              <a:spcAft>
-                <a:spcPts val="1200"/>
-              </a:spcAft>
-              <a:defRPr sz="1800" b="0">
+              <a:defRPr sz="2000">
                 <a:solidFill>
                   <a:srgbClr val="232830"/>
                 </a:solidFill>
-              </a:defRPr>
-            </a:pPr>
-            <a:r>
-              <a:t>Suppose target xᵢ = (4, 1).</a:t>
-            </a:r>
-          </a:p>
-          <a:p>
-            <a:pPr>
-              <a:spcAft>
-                <a:spcPts val="1200"/>
-              </a:spcAft>
-              <a:defRPr sz="1800" b="0">
-                <a:solidFill>
-                  <a:srgbClr val="232830"/>
-                </a:solidFill>
-              </a:defRPr>
-            </a:pPr>
-            <a:r>
-              <a:t>Choose r₁, r₂, r₃ and compute vᵢ = xᵣ₁ + F(xᵣ₂ − xᵣ₃).</a:t>
-            </a:r>
-          </a:p>
-          <a:p>
-            <a:pPr>
-              <a:spcAft>
-                <a:spcPts val="1200"/>
-              </a:spcAft>
-              <a:defRPr sz="1800" b="0">
-                <a:solidFill>
-                  <a:srgbClr val="232830"/>
-                </a:solidFill>
-              </a:defRPr>
-            </a:pPr>
-            <a:r>
-              <a:t>Apply crossover to create a trial uᵢ.</a:t>
-            </a:r>
-          </a:p>
-          <a:p>
-            <a:pPr>
-              <a:spcAft>
-                <a:spcPts val="1200"/>
-              </a:spcAft>
-              <a:defRPr sz="1800" b="0">
-                <a:solidFill>
-                  <a:srgbClr val="232830"/>
-                </a:solidFill>
-              </a:defRPr>
-            </a:pPr>
-            <a:r>
-              <a:t>Evaluate f(uᵢ) and f(xᵢ). The lower value becomes the next population member.</a:t>
-            </a:r>
-          </a:p>
-          <a:p>
-            <a:pPr>
-              <a:spcAft>
-                <a:spcPts val="1200"/>
-              </a:spcAft>
-              <a:defRPr sz="1800" b="0">
-                <a:solidFill>
-                  <a:srgbClr val="232830"/>
-                </a:solidFill>
-              </a:defRPr>
-            </a:pPr>
-            <a:r>
-              <a:t>Repeating this process moves the population toward the optimum.</a:t>
-            </a:r>
-          </a:p>
-        </p:txBody>
-      </p:sp>
-      <p:sp>
-        <p:nvSpPr>
-          <p:cNvPr id="6" name="Rectangle 5"/>
+                <a:latin typeface="Consolas"/>
+              </a:defRPr>
+            </a:pPr>
+            <a:r>
+              <a:t>Initialize population X = {x₁, …, xNP}</a:t>
+            </a:r>
+            <a:br/>
+            <a:r>
+              <a:t>Evaluate f(xᵢ) for every vector</a:t>
+            </a:r>
+            <a:br/>
+            <a:br/>
+            <a:r>
+              <a:t>while stopping criterion is not met:</a:t>
+            </a:r>
+            <a:br/>
+            <a:r>
+              <a:t>    for each target vector xᵢ:</a:t>
+            </a:r>
+            <a:br/>
+            <a:r>
+              <a:t>        choose distinct r₁, r₂, r₃ ≠ i</a:t>
+            </a:r>
+            <a:br/>
+            <a:r>
+              <a:t>        vᵢ ← xᵣ₁ + F · (xᵣ₂ − xᵣ₃)</a:t>
+            </a:r>
+            <a:br/>
+            <a:r>
+              <a:t>        uᵢ ← crossover(xᵢ, vᵢ, CR)</a:t>
+            </a:r>
+            <a:br/>
+            <a:r>
+              <a:t>        if f(uᵢ) ≤ f(xᵢ):</a:t>
+            </a:r>
+            <a:br/>
+            <a:r>
+              <a:t>            xᵢ ← uᵢ</a:t>
+            </a:r>
+            <a:br/>
+            <a:br/>
+            <a:r>
+              <a:t>return best vector found</a:t>
+            </a:r>
+          </a:p>
+        </p:txBody>
+      </p:sp>
+      <p:sp>
+        <p:nvSpPr>
+          <p:cNvPr id="4" name="Rectangle 3"/>
           <p:cNvSpPr/>
           <p:nvPr/>
         </p:nvSpPr>
@@ -10931,7 +10695,7 @@
       </p:sp>
       <p:sp>
         <p:nvSpPr>
-          <p:cNvPr id="7" name="TextBox 6"/>
+          <p:cNvPr id="5" name="TextBox 4"/>
           <p:cNvSpPr txBox="1"/>
           <p:nvPr/>
         </p:nvSpPr>
@@ -10959,7 +10723,7 @@
               </a:defRPr>
             </a:pPr>
             <a:r>
-              <a:t>9</a:t>
+              <a:t>10</a:t>
             </a:r>
           </a:p>
         </p:txBody>
